--- a/public/lessons/year-6-maths/summer/week-25/solve-volume-problems/teaching-powerpoint-v1.pptx
+++ b/public/lessons/year-6-maths/summer/week-25/solve-volume-problems/teaching-powerpoint-v1.pptx
@@ -2,24 +2,24 @@
 <file path=ppt/presentation.xml><?xml version="1.0" encoding="utf-8"?>
 <p:presentation xmlns:p="http://schemas.openxmlformats.org/presentationml/2006/main">
   <p:sldMasterIdLst>
-    <p:sldMasterId xmlns:r="http://schemas.openxmlformats.org/officeDocument/2006/relationships" id="2147483648" r:id="R3d7fb5fb848e48dd"/>
+    <p:sldMasterId xmlns:r="http://schemas.openxmlformats.org/officeDocument/2006/relationships" id="2147483648" r:id="R2472cdd31e854bca"/>
   </p:sldMasterIdLst>
   <p:notesMasterIdLst>
-    <p:notesMasterId xmlns:r="http://schemas.openxmlformats.org/officeDocument/2006/relationships" r:id="Rb2669dccfa954723"/>
+    <p:notesMasterId xmlns:r="http://schemas.openxmlformats.org/officeDocument/2006/relationships" r:id="R9291b7c314d74f8a"/>
   </p:notesMasterIdLst>
   <p:sldIdLst>
-    <p:sldId xmlns:r="http://schemas.openxmlformats.org/officeDocument/2006/relationships" id="256" r:id="R9d31ccacc2084103"/>
-    <p:sldId xmlns:r="http://schemas.openxmlformats.org/officeDocument/2006/relationships" id="257" r:id="R4e7db4cf1d2d4f0d"/>
-    <p:sldId xmlns:r="http://schemas.openxmlformats.org/officeDocument/2006/relationships" id="258" r:id="R3af51fb81fad41a1"/>
-    <p:sldId xmlns:r="http://schemas.openxmlformats.org/officeDocument/2006/relationships" id="259" r:id="R0df647f85ebf4602"/>
-    <p:sldId xmlns:r="http://schemas.openxmlformats.org/officeDocument/2006/relationships" id="260" r:id="R986ab866d3e84088"/>
-    <p:sldId xmlns:r="http://schemas.openxmlformats.org/officeDocument/2006/relationships" id="261" r:id="Rddc13a2403ad48db"/>
-    <p:sldId xmlns:r="http://schemas.openxmlformats.org/officeDocument/2006/relationships" id="262" r:id="Rff48109430bc4d39"/>
-    <p:sldId xmlns:r="http://schemas.openxmlformats.org/officeDocument/2006/relationships" id="263" r:id="R84129045f562426d"/>
-    <p:sldId xmlns:r="http://schemas.openxmlformats.org/officeDocument/2006/relationships" id="264" r:id="Rc3a7d26075534e7b"/>
-    <p:sldId xmlns:r="http://schemas.openxmlformats.org/officeDocument/2006/relationships" id="265" r:id="Rca5706c5afe64caf"/>
-    <p:sldId xmlns:r="http://schemas.openxmlformats.org/officeDocument/2006/relationships" id="266" r:id="R2a07355582904e61"/>
-    <p:sldId xmlns:r="http://schemas.openxmlformats.org/officeDocument/2006/relationships" id="267" r:id="Rdbb780c2865347dd"/>
+    <p:sldId xmlns:r="http://schemas.openxmlformats.org/officeDocument/2006/relationships" id="256" r:id="R611a44534e53453e"/>
+    <p:sldId xmlns:r="http://schemas.openxmlformats.org/officeDocument/2006/relationships" id="257" r:id="R63b672e38ea5470f"/>
+    <p:sldId xmlns:r="http://schemas.openxmlformats.org/officeDocument/2006/relationships" id="258" r:id="Rfb0a3571fa184b38"/>
+    <p:sldId xmlns:r="http://schemas.openxmlformats.org/officeDocument/2006/relationships" id="259" r:id="R6bd04348b6ea4bf5"/>
+    <p:sldId xmlns:r="http://schemas.openxmlformats.org/officeDocument/2006/relationships" id="260" r:id="Re4a97efb87a54e1e"/>
+    <p:sldId xmlns:r="http://schemas.openxmlformats.org/officeDocument/2006/relationships" id="261" r:id="R455686ee7a7f41db"/>
+    <p:sldId xmlns:r="http://schemas.openxmlformats.org/officeDocument/2006/relationships" id="262" r:id="R26ae52865cf84269"/>
+    <p:sldId xmlns:r="http://schemas.openxmlformats.org/officeDocument/2006/relationships" id="263" r:id="Rd78471bd3d5f426e"/>
+    <p:sldId xmlns:r="http://schemas.openxmlformats.org/officeDocument/2006/relationships" id="264" r:id="Red59a28868524871"/>
+    <p:sldId xmlns:r="http://schemas.openxmlformats.org/officeDocument/2006/relationships" id="265" r:id="Rdc467b9d144a4d99"/>
+    <p:sldId xmlns:r="http://schemas.openxmlformats.org/officeDocument/2006/relationships" id="266" r:id="Rba29e6fabb7e4937"/>
+    <p:sldId xmlns:r="http://schemas.openxmlformats.org/officeDocument/2006/relationships" id="267" r:id="R097be749e2844ae4"/>
   </p:sldIdLst>
   <p:sldSz cx="12192000" cy="6858000"/>
   <p:notesSz cx="6858000" cy="9144000"/>
@@ -873,7 +873,7 @@
           <a:lstStyle xmlns:a="http://schemas.openxmlformats.org/drawingml/2006/main"/>
           <a:p xmlns:a="http://schemas.openxmlformats.org/drawingml/2006/main">
             <a:r>
-              <a:t>I do. Reveal the question, setup and each calculation stage one click at a time. Pupils watch before copying. Model answer: 240 cubes.</a:t>
+              <a:t>I do. Reveal the question, then reveal each mathematical change one click at a time. Point to the numbers and operation that changed before moving to the next line. Final answer: 240 cubes.</a:t>
             </a:r>
           </a:p>
         </p:txBody>
@@ -1291,7 +1291,7 @@
   </p:cSld>
   <p:clrMap bg1="lt1" tx1="dk1" bg2="lt2" tx2="dk2" accent1="accent1" accent2="accent2" accent3="accent3" accent4="accent4" accent5="accent5" accent6="accent6" hlink="hlink" folHlink="folHlink"/>
   <p:sldLayoutIdLst>
-    <p:sldLayoutId xmlns:r="http://schemas.openxmlformats.org/officeDocument/2006/relationships" id="2147483649" r:id="R58d83ad3a9284004"/>
+    <p:sldLayoutId xmlns:r="http://schemas.openxmlformats.org/officeDocument/2006/relationships" id="2147483649" r:id="Rad7e003a4f324d28"/>
   </p:sldLayoutIdLst>
   <p:txStyles>
     <p:titleStyle>
@@ -1842,7 +1842,7 @@
           <p:cNvPr id="12" name="">
             <a:extLst xmlns:a="http://schemas.openxmlformats.org/drawingml/2006/main">
               <a:ext uri="{FF2B5EF4-FFF2-40B4-BE49-F238E27FC236}">
-                <a16:creationId xmlns:a16="http://schemas.microsoft.com/office/drawing/2014/main" id="{0AB87423-1EA3-4F4A-97CA-B8F6226181FE}"/>
+                <a16:creationId xmlns:a16="http://schemas.microsoft.com/office/drawing/2014/main" id="{CDE34D3A-3751-40C6-8D88-F9781ADB8A1D}"/>
               </a:ext>
             </a:extLst>
           </p:cNvPr>
@@ -1874,7 +1874,7 @@
           <p:cNvPr id="2" name="">
             <a:extLst xmlns:a="http://schemas.openxmlformats.org/drawingml/2006/main">
               <a:ext uri="{FF2B5EF4-FFF2-40B4-BE49-F238E27FC236}">
-                <a16:creationId xmlns:a16="http://schemas.microsoft.com/office/drawing/2014/main" id="{FBA76514-CB36-45F4-A874-9E449F60C704}"/>
+                <a16:creationId xmlns:a16="http://schemas.microsoft.com/office/drawing/2014/main" id="{1E8B4ED0-06A8-4656-B2C9-6307B02CEA94}"/>
               </a:ext>
             </a:extLst>
           </p:cNvPr>
@@ -1931,7 +1931,7 @@
           <p:cNvPr id="3" name="">
             <a:extLst xmlns:a="http://schemas.openxmlformats.org/drawingml/2006/main">
               <a:ext uri="{FF2B5EF4-FFF2-40B4-BE49-F238E27FC236}">
-                <a16:creationId xmlns:a16="http://schemas.microsoft.com/office/drawing/2014/main" id="{9ED145FB-BEE9-438D-8205-EB0BA0E85AF8}"/>
+                <a16:creationId xmlns:a16="http://schemas.microsoft.com/office/drawing/2014/main" id="{C3938131-473C-4C92-9C43-90696AE152D2}"/>
               </a:ext>
             </a:extLst>
           </p:cNvPr>
@@ -1965,7 +1965,7 @@
           <p:cNvPr id="4" name="">
             <a:extLst xmlns:a="http://schemas.openxmlformats.org/drawingml/2006/main">
               <a:ext uri="{FF2B5EF4-FFF2-40B4-BE49-F238E27FC236}">
-                <a16:creationId xmlns:a16="http://schemas.microsoft.com/office/drawing/2014/main" id="{A8364297-5504-4F91-B4D0-527D8734708A}"/>
+                <a16:creationId xmlns:a16="http://schemas.microsoft.com/office/drawing/2014/main" id="{63B2963D-42F2-47C3-AF22-D8EA2B67B075}"/>
               </a:ext>
             </a:extLst>
           </p:cNvPr>
@@ -2022,7 +2022,7 @@
           <p:cNvPr id="5" name="">
             <a:extLst xmlns:a="http://schemas.openxmlformats.org/drawingml/2006/main">
               <a:ext uri="{FF2B5EF4-FFF2-40B4-BE49-F238E27FC236}">
-                <a16:creationId xmlns:a16="http://schemas.microsoft.com/office/drawing/2014/main" id="{ECB089DA-F463-4A79-8330-7139F6B05BAE}"/>
+                <a16:creationId xmlns:a16="http://schemas.microsoft.com/office/drawing/2014/main" id="{5BA88290-0FEC-4051-9F65-9908FB230B57}"/>
               </a:ext>
             </a:extLst>
           </p:cNvPr>
@@ -2079,7 +2079,7 @@
           <p:cNvPr id="6" name="">
             <a:extLst xmlns:a="http://schemas.openxmlformats.org/drawingml/2006/main">
               <a:ext uri="{FF2B5EF4-FFF2-40B4-BE49-F238E27FC236}">
-                <a16:creationId xmlns:a16="http://schemas.microsoft.com/office/drawing/2014/main" id="{DC5E855E-3A68-4129-9338-7AB4B8E6E92C}"/>
+                <a16:creationId xmlns:a16="http://schemas.microsoft.com/office/drawing/2014/main" id="{97944785-1089-4812-9D66-5380330855BA}"/>
               </a:ext>
             </a:extLst>
           </p:cNvPr>
@@ -2113,7 +2113,7 @@
           <p:cNvPr id="7" name="">
             <a:extLst xmlns:a="http://schemas.openxmlformats.org/drawingml/2006/main">
               <a:ext uri="{FF2B5EF4-FFF2-40B4-BE49-F238E27FC236}">
-                <a16:creationId xmlns:a16="http://schemas.microsoft.com/office/drawing/2014/main" id="{C11F3D85-D143-4F77-9574-934D97556E44}"/>
+                <a16:creationId xmlns:a16="http://schemas.microsoft.com/office/drawing/2014/main" id="{5247CC3E-A51C-4691-86AE-E68FC68B743D}"/>
               </a:ext>
             </a:extLst>
           </p:cNvPr>
@@ -2170,7 +2170,7 @@
           <p:cNvPr id="8" name="">
             <a:extLst xmlns:a="http://schemas.openxmlformats.org/drawingml/2006/main">
               <a:ext uri="{FF2B5EF4-FFF2-40B4-BE49-F238E27FC236}">
-                <a16:creationId xmlns:a16="http://schemas.microsoft.com/office/drawing/2014/main" id="{2F3FE05A-D239-416B-BF89-C7FDB1A62DCC}"/>
+                <a16:creationId xmlns:a16="http://schemas.microsoft.com/office/drawing/2014/main" id="{4AA35FA1-07F0-4BB3-A529-CA8F1A04A923}"/>
               </a:ext>
             </a:extLst>
           </p:cNvPr>
@@ -2227,7 +2227,7 @@
           <p:cNvPr id="9" name="">
             <a:extLst xmlns:a="http://schemas.openxmlformats.org/drawingml/2006/main">
               <a:ext uri="{FF2B5EF4-FFF2-40B4-BE49-F238E27FC236}">
-                <a16:creationId xmlns:a16="http://schemas.microsoft.com/office/drawing/2014/main" id="{5A62943F-EC96-4312-A7B2-7B203672F181}"/>
+                <a16:creationId xmlns:a16="http://schemas.microsoft.com/office/drawing/2014/main" id="{3B3CE17E-13C7-4993-90E3-7327C7EC8B16}"/>
               </a:ext>
             </a:extLst>
           </p:cNvPr>
@@ -2284,7 +2284,7 @@
           <p:cNvPr id="10" name="">
             <a:extLst xmlns:a="http://schemas.openxmlformats.org/drawingml/2006/main">
               <a:ext uri="{FF2B5EF4-FFF2-40B4-BE49-F238E27FC236}">
-                <a16:creationId xmlns:a16="http://schemas.microsoft.com/office/drawing/2014/main" id="{38A12CBF-4ECB-41E7-99EC-B6CE6F51B4F6}"/>
+                <a16:creationId xmlns:a16="http://schemas.microsoft.com/office/drawing/2014/main" id="{75ED83FA-F4BB-4DFD-8CFE-F17B1D56D820}"/>
               </a:ext>
             </a:extLst>
           </p:cNvPr>
@@ -2341,7 +2341,7 @@
           <p:cNvPr id="11" name="">
             <a:extLst xmlns:a="http://schemas.openxmlformats.org/drawingml/2006/main">
               <a:ext uri="{FF2B5EF4-FFF2-40B4-BE49-F238E27FC236}">
-                <a16:creationId xmlns:a16="http://schemas.microsoft.com/office/drawing/2014/main" id="{48F692EB-62ED-4018-878E-1B2FC3B49423}"/>
+                <a16:creationId xmlns:a16="http://schemas.microsoft.com/office/drawing/2014/main" id="{AFBDFCEF-A7CB-41BC-8582-21C869206498}"/>
               </a:ext>
             </a:extLst>
           </p:cNvPr>
@@ -2396,7 +2396,7 @@
     </p:spTree>
     <p:extLst>
       <p:ext uri="{BB962C8B-B14F-4D97-AF65-F5344CB8AC3E}">
-        <p14:creationId xmlns:p14="http://schemas.microsoft.com/office/powerpoint/2010/main" val="1836666472"/>
+        <p14:creationId xmlns:p14="http://schemas.microsoft.com/office/powerpoint/2010/main" val="1332033560"/>
       </p:ext>
     </p:extLst>
   </p:cSld>
@@ -2427,7 +2427,7 @@
           <p:cNvPr id="14" name="">
             <a:extLst xmlns:a="http://schemas.openxmlformats.org/drawingml/2006/main">
               <a:ext uri="{FF2B5EF4-FFF2-40B4-BE49-F238E27FC236}">
-                <a16:creationId xmlns:a16="http://schemas.microsoft.com/office/drawing/2014/main" id="{2C87D249-4209-4543-AA0A-A2D08B527DA9}"/>
+                <a16:creationId xmlns:a16="http://schemas.microsoft.com/office/drawing/2014/main" id="{5F5ADB8F-5959-43BC-92C1-46142E64E2C2}"/>
               </a:ext>
             </a:extLst>
           </p:cNvPr>
@@ -2459,7 +2459,7 @@
           <p:cNvPr id="2" name="">
             <a:extLst xmlns:a="http://schemas.openxmlformats.org/drawingml/2006/main">
               <a:ext uri="{FF2B5EF4-FFF2-40B4-BE49-F238E27FC236}">
-                <a16:creationId xmlns:a16="http://schemas.microsoft.com/office/drawing/2014/main" id="{A513994F-13B3-42F4-9B11-3BF9EDC7985F}"/>
+                <a16:creationId xmlns:a16="http://schemas.microsoft.com/office/drawing/2014/main" id="{116B94BC-79B1-4E11-AA27-D508C35E721D}"/>
               </a:ext>
             </a:extLst>
           </p:cNvPr>
@@ -2516,7 +2516,7 @@
           <p:cNvPr id="3" name="">
             <a:extLst xmlns:a="http://schemas.openxmlformats.org/drawingml/2006/main">
               <a:ext uri="{FF2B5EF4-FFF2-40B4-BE49-F238E27FC236}">
-                <a16:creationId xmlns:a16="http://schemas.microsoft.com/office/drawing/2014/main" id="{AD1F8639-668F-41E1-8A97-52A4599EEC09}"/>
+                <a16:creationId xmlns:a16="http://schemas.microsoft.com/office/drawing/2014/main" id="{5352763C-3134-491E-88A5-424827C0201F}"/>
               </a:ext>
             </a:extLst>
           </p:cNvPr>
@@ -2548,7 +2548,7 @@
           <p:cNvPr id="4" name="">
             <a:extLst xmlns:a="http://schemas.openxmlformats.org/drawingml/2006/main">
               <a:ext uri="{FF2B5EF4-FFF2-40B4-BE49-F238E27FC236}">
-                <a16:creationId xmlns:a16="http://schemas.microsoft.com/office/drawing/2014/main" id="{11F5E825-0906-4004-BE98-3F027CBC014E}"/>
+                <a16:creationId xmlns:a16="http://schemas.microsoft.com/office/drawing/2014/main" id="{CCFFA993-81B6-4B83-A0A2-672E7C499410}"/>
               </a:ext>
             </a:extLst>
           </p:cNvPr>
@@ -2605,7 +2605,7 @@
           <p:cNvPr id="5" name="">
             <a:extLst xmlns:a="http://schemas.openxmlformats.org/drawingml/2006/main">
               <a:ext uri="{FF2B5EF4-FFF2-40B4-BE49-F238E27FC236}">
-                <a16:creationId xmlns:a16="http://schemas.microsoft.com/office/drawing/2014/main" id="{00789AEF-5DE5-416C-A686-FB2A1B94BEAA}"/>
+                <a16:creationId xmlns:a16="http://schemas.microsoft.com/office/drawing/2014/main" id="{11B6C33C-6811-4631-8345-1D0A8C3C66AE}"/>
               </a:ext>
             </a:extLst>
           </p:cNvPr>
@@ -2662,7 +2662,7 @@
           <p:cNvPr id="6" name="">
             <a:extLst xmlns:a="http://schemas.openxmlformats.org/drawingml/2006/main">
               <a:ext uri="{FF2B5EF4-FFF2-40B4-BE49-F238E27FC236}">
-                <a16:creationId xmlns:a16="http://schemas.microsoft.com/office/drawing/2014/main" id="{AE62E956-E1FE-4592-A634-FB27CF624DC8}"/>
+                <a16:creationId xmlns:a16="http://schemas.microsoft.com/office/drawing/2014/main" id="{8FD5035A-2998-496C-9B72-06683A2ECF8D}"/>
               </a:ext>
             </a:extLst>
           </p:cNvPr>
@@ -2719,7 +2719,7 @@
           <p:cNvPr id="7" name="">
             <a:extLst xmlns:a="http://schemas.openxmlformats.org/drawingml/2006/main">
               <a:ext uri="{FF2B5EF4-FFF2-40B4-BE49-F238E27FC236}">
-                <a16:creationId xmlns:a16="http://schemas.microsoft.com/office/drawing/2014/main" id="{3053A5C9-ABDE-49FD-B4FE-1F7E872530B6}"/>
+                <a16:creationId xmlns:a16="http://schemas.microsoft.com/office/drawing/2014/main" id="{8DC66369-CDBE-4945-8D87-1AF257366FCF}"/>
               </a:ext>
             </a:extLst>
           </p:cNvPr>
@@ -2751,7 +2751,7 @@
           <p:cNvPr id="8" name="">
             <a:extLst xmlns:a="http://schemas.openxmlformats.org/drawingml/2006/main">
               <a:ext uri="{FF2B5EF4-FFF2-40B4-BE49-F238E27FC236}">
-                <a16:creationId xmlns:a16="http://schemas.microsoft.com/office/drawing/2014/main" id="{82389D75-C849-4F9E-84D2-E3834D341A2F}"/>
+                <a16:creationId xmlns:a16="http://schemas.microsoft.com/office/drawing/2014/main" id="{04AC713E-9267-4CB2-98A1-2B60B5369232}"/>
               </a:ext>
             </a:extLst>
           </p:cNvPr>
@@ -2808,7 +2808,7 @@
           <p:cNvPr id="9" name="">
             <a:extLst xmlns:a="http://schemas.openxmlformats.org/drawingml/2006/main">
               <a:ext uri="{FF2B5EF4-FFF2-40B4-BE49-F238E27FC236}">
-                <a16:creationId xmlns:a16="http://schemas.microsoft.com/office/drawing/2014/main" id="{8D4644B0-54A9-40E3-980B-C7A167D2EB93}"/>
+                <a16:creationId xmlns:a16="http://schemas.microsoft.com/office/drawing/2014/main" id="{AF1BD01C-1BF5-41D5-904D-5854EE4BAA2C}"/>
               </a:ext>
             </a:extLst>
           </p:cNvPr>
@@ -2865,7 +2865,7 @@
           <p:cNvPr id="10" name="">
             <a:extLst xmlns:a="http://schemas.openxmlformats.org/drawingml/2006/main">
               <a:ext uri="{FF2B5EF4-FFF2-40B4-BE49-F238E27FC236}">
-                <a16:creationId xmlns:a16="http://schemas.microsoft.com/office/drawing/2014/main" id="{BD970E28-F12A-4B97-9F0F-5C26969B16D6}"/>
+                <a16:creationId xmlns:a16="http://schemas.microsoft.com/office/drawing/2014/main" id="{D4123E6A-5AEA-4A93-B057-FE7072A67680}"/>
               </a:ext>
             </a:extLst>
           </p:cNvPr>
@@ -2922,7 +2922,7 @@
           <p:cNvPr id="11" name="">
             <a:extLst xmlns:a="http://schemas.openxmlformats.org/drawingml/2006/main">
               <a:ext uri="{FF2B5EF4-FFF2-40B4-BE49-F238E27FC236}">
-                <a16:creationId xmlns:a16="http://schemas.microsoft.com/office/drawing/2014/main" id="{B6BBD15C-D8C0-4100-BE44-565548FECBAD}"/>
+                <a16:creationId xmlns:a16="http://schemas.microsoft.com/office/drawing/2014/main" id="{6AD3276C-DEE8-4793-A8C2-DCA15560D8CE}"/>
               </a:ext>
             </a:extLst>
           </p:cNvPr>
@@ -2979,7 +2979,7 @@
           <p:cNvPr id="12" name="">
             <a:extLst xmlns:a="http://schemas.openxmlformats.org/drawingml/2006/main">
               <a:ext uri="{FF2B5EF4-FFF2-40B4-BE49-F238E27FC236}">
-                <a16:creationId xmlns:a16="http://schemas.microsoft.com/office/drawing/2014/main" id="{D2388DE3-08A3-4055-B143-38505E6F5E9E}"/>
+                <a16:creationId xmlns:a16="http://schemas.microsoft.com/office/drawing/2014/main" id="{FABB3CAC-00B6-4593-9257-F74EA010B0A3}"/>
               </a:ext>
             </a:extLst>
           </p:cNvPr>
@@ -3036,7 +3036,7 @@
           <p:cNvPr id="13" name="">
             <a:extLst xmlns:a="http://schemas.openxmlformats.org/drawingml/2006/main">
               <a:ext uri="{FF2B5EF4-FFF2-40B4-BE49-F238E27FC236}">
-                <a16:creationId xmlns:a16="http://schemas.microsoft.com/office/drawing/2014/main" id="{D1B48915-C0C0-46A7-8C96-0E5D37680E9D}"/>
+                <a16:creationId xmlns:a16="http://schemas.microsoft.com/office/drawing/2014/main" id="{D31435DB-B91D-4ADE-B175-F4C5466DE2B0}"/>
               </a:ext>
             </a:extLst>
           </p:cNvPr>
@@ -3091,7 +3091,7 @@
     </p:spTree>
     <p:extLst>
       <p:ext uri="{BB962C8B-B14F-4D97-AF65-F5344CB8AC3E}">
-        <p14:creationId xmlns:p14="http://schemas.microsoft.com/office/powerpoint/2010/main" val="1743372442"/>
+        <p14:creationId xmlns:p14="http://schemas.microsoft.com/office/powerpoint/2010/main" val="1653045025"/>
       </p:ext>
     </p:extLst>
   </p:cSld>
@@ -3292,7 +3292,7 @@
           <p:cNvPr id="19" name="">
             <a:extLst xmlns:a="http://schemas.openxmlformats.org/drawingml/2006/main">
               <a:ext uri="{FF2B5EF4-FFF2-40B4-BE49-F238E27FC236}">
-                <a16:creationId xmlns:a16="http://schemas.microsoft.com/office/drawing/2014/main" id="{DD3D075B-5431-423E-BD60-5AE8DB0CC67F}"/>
+                <a16:creationId xmlns:a16="http://schemas.microsoft.com/office/drawing/2014/main" id="{78B12585-4F6F-4C23-90FA-A5FABC59AC28}"/>
               </a:ext>
             </a:extLst>
           </p:cNvPr>
@@ -3324,7 +3324,7 @@
           <p:cNvPr id="2" name="">
             <a:extLst xmlns:a="http://schemas.openxmlformats.org/drawingml/2006/main">
               <a:ext uri="{FF2B5EF4-FFF2-40B4-BE49-F238E27FC236}">
-                <a16:creationId xmlns:a16="http://schemas.microsoft.com/office/drawing/2014/main" id="{6464B09A-F59B-43AB-BDD3-18090F71CBC8}"/>
+                <a16:creationId xmlns:a16="http://schemas.microsoft.com/office/drawing/2014/main" id="{96CF6CD6-5898-4D8B-90B3-6C4C86F7FAD2}"/>
               </a:ext>
             </a:extLst>
           </p:cNvPr>
@@ -3381,7 +3381,7 @@
           <p:cNvPr id="3" name="">
             <a:extLst xmlns:a="http://schemas.openxmlformats.org/drawingml/2006/main">
               <a:ext uri="{FF2B5EF4-FFF2-40B4-BE49-F238E27FC236}">
-                <a16:creationId xmlns:a16="http://schemas.microsoft.com/office/drawing/2014/main" id="{CF37EAB9-C1E7-47B8-A9CD-AA44941CB976}"/>
+                <a16:creationId xmlns:a16="http://schemas.microsoft.com/office/drawing/2014/main" id="{AD9A24D7-E785-44CB-86D3-AEF7DAFF3949}"/>
               </a:ext>
             </a:extLst>
           </p:cNvPr>
@@ -3413,7 +3413,7 @@
           <p:cNvPr id="4" name="">
             <a:extLst xmlns:a="http://schemas.openxmlformats.org/drawingml/2006/main">
               <a:ext uri="{FF2B5EF4-FFF2-40B4-BE49-F238E27FC236}">
-                <a16:creationId xmlns:a16="http://schemas.microsoft.com/office/drawing/2014/main" id="{ECAF5C41-6764-4E8B-96B5-31DB97AA73A7}"/>
+                <a16:creationId xmlns:a16="http://schemas.microsoft.com/office/drawing/2014/main" id="{E23C6419-BD15-468C-982D-FB9246008ADF}"/>
               </a:ext>
             </a:extLst>
           </p:cNvPr>
@@ -3470,7 +3470,7 @@
           <p:cNvPr id="5" name="">
             <a:extLst xmlns:a="http://schemas.openxmlformats.org/drawingml/2006/main">
               <a:ext uri="{FF2B5EF4-FFF2-40B4-BE49-F238E27FC236}">
-                <a16:creationId xmlns:a16="http://schemas.microsoft.com/office/drawing/2014/main" id="{3CACB624-6CC2-42FF-B5DD-343927405D96}"/>
+                <a16:creationId xmlns:a16="http://schemas.microsoft.com/office/drawing/2014/main" id="{816FD82D-2477-42FD-9328-2F0B3449E122}"/>
               </a:ext>
             </a:extLst>
           </p:cNvPr>
@@ -3527,7 +3527,7 @@
           <p:cNvPr id="6" name="">
             <a:extLst xmlns:a="http://schemas.openxmlformats.org/drawingml/2006/main">
               <a:ext uri="{FF2B5EF4-FFF2-40B4-BE49-F238E27FC236}">
-                <a16:creationId xmlns:a16="http://schemas.microsoft.com/office/drawing/2014/main" id="{A1F4F5E2-6A09-46C5-9524-A1EC215F1E7E}"/>
+                <a16:creationId xmlns:a16="http://schemas.microsoft.com/office/drawing/2014/main" id="{7D062B80-C97A-42B3-AF61-5A6E27B386C0}"/>
               </a:ext>
             </a:extLst>
           </p:cNvPr>
@@ -3584,7 +3584,7 @@
           <p:cNvPr id="7" name="">
             <a:extLst xmlns:a="http://schemas.openxmlformats.org/drawingml/2006/main">
               <a:ext uri="{FF2B5EF4-FFF2-40B4-BE49-F238E27FC236}">
-                <a16:creationId xmlns:a16="http://schemas.microsoft.com/office/drawing/2014/main" id="{8EF1B868-4552-4701-A6B3-102D895F9693}"/>
+                <a16:creationId xmlns:a16="http://schemas.microsoft.com/office/drawing/2014/main" id="{9B83AD38-C85D-4919-B37D-B19A1C945634}"/>
               </a:ext>
             </a:extLst>
           </p:cNvPr>
@@ -3616,7 +3616,7 @@
           <p:cNvPr id="8" name="">
             <a:extLst xmlns:a="http://schemas.openxmlformats.org/drawingml/2006/main">
               <a:ext uri="{FF2B5EF4-FFF2-40B4-BE49-F238E27FC236}">
-                <a16:creationId xmlns:a16="http://schemas.microsoft.com/office/drawing/2014/main" id="{9A340FCF-098F-41A4-9780-0D9FE53FF21E}"/>
+                <a16:creationId xmlns:a16="http://schemas.microsoft.com/office/drawing/2014/main" id="{9147FC05-B6B3-45DB-93C6-ECC461706651}"/>
               </a:ext>
             </a:extLst>
           </p:cNvPr>
@@ -3673,7 +3673,7 @@
           <p:cNvPr id="9" name="">
             <a:extLst xmlns:a="http://schemas.openxmlformats.org/drawingml/2006/main">
               <a:ext uri="{FF2B5EF4-FFF2-40B4-BE49-F238E27FC236}">
-                <a16:creationId xmlns:a16="http://schemas.microsoft.com/office/drawing/2014/main" id="{AB9934E7-CF99-4EC7-9574-A06A5628B57A}"/>
+                <a16:creationId xmlns:a16="http://schemas.microsoft.com/office/drawing/2014/main" id="{6DEFC0A7-F8A4-4FCF-8677-4982F28AE1B4}"/>
               </a:ext>
             </a:extLst>
           </p:cNvPr>
@@ -3730,7 +3730,7 @@
           <p:cNvPr id="10" name="">
             <a:extLst xmlns:a="http://schemas.openxmlformats.org/drawingml/2006/main">
               <a:ext uri="{FF2B5EF4-FFF2-40B4-BE49-F238E27FC236}">
-                <a16:creationId xmlns:a16="http://schemas.microsoft.com/office/drawing/2014/main" id="{84C7354E-9DCD-4D1C-BD8B-F63D1167D604}"/>
+                <a16:creationId xmlns:a16="http://schemas.microsoft.com/office/drawing/2014/main" id="{7CCD1205-5380-4D11-8431-17491DBDB5C8}"/>
               </a:ext>
             </a:extLst>
           </p:cNvPr>
@@ -3787,7 +3787,7 @@
           <p:cNvPr id="11" name="">
             <a:extLst xmlns:a="http://schemas.openxmlformats.org/drawingml/2006/main">
               <a:ext uri="{FF2B5EF4-FFF2-40B4-BE49-F238E27FC236}">
-                <a16:creationId xmlns:a16="http://schemas.microsoft.com/office/drawing/2014/main" id="{26639809-A814-4945-AFA8-8A5EEB2FEF4C}"/>
+                <a16:creationId xmlns:a16="http://schemas.microsoft.com/office/drawing/2014/main" id="{EC807A07-056D-4FA5-B56B-B2DD129310F9}"/>
               </a:ext>
             </a:extLst>
           </p:cNvPr>
@@ -3821,7 +3821,7 @@
           <p:cNvPr id="12" name="">
             <a:extLst xmlns:a="http://schemas.openxmlformats.org/drawingml/2006/main">
               <a:ext uri="{FF2B5EF4-FFF2-40B4-BE49-F238E27FC236}">
-                <a16:creationId xmlns:a16="http://schemas.microsoft.com/office/drawing/2014/main" id="{24C5AFE7-8D7F-41C8-97D3-79386867A596}"/>
+                <a16:creationId xmlns:a16="http://schemas.microsoft.com/office/drawing/2014/main" id="{C6CC2066-6D31-4A69-88BF-F0CF6190194B}"/>
               </a:ext>
             </a:extLst>
           </p:cNvPr>
@@ -3878,7 +3878,7 @@
           <p:cNvPr id="13" name="">
             <a:extLst xmlns:a="http://schemas.openxmlformats.org/drawingml/2006/main">
               <a:ext uri="{FF2B5EF4-FFF2-40B4-BE49-F238E27FC236}">
-                <a16:creationId xmlns:a16="http://schemas.microsoft.com/office/drawing/2014/main" id="{EE5C4E83-63CA-4DB1-AD89-54D234F12D4F}"/>
+                <a16:creationId xmlns:a16="http://schemas.microsoft.com/office/drawing/2014/main" id="{B56862A7-E752-48C6-94CB-5652ADDF585C}"/>
               </a:ext>
             </a:extLst>
           </p:cNvPr>
@@ -3935,7 +3935,7 @@
           <p:cNvPr id="14" name="">
             <a:extLst xmlns:a="http://schemas.openxmlformats.org/drawingml/2006/main">
               <a:ext uri="{FF2B5EF4-FFF2-40B4-BE49-F238E27FC236}">
-                <a16:creationId xmlns:a16="http://schemas.microsoft.com/office/drawing/2014/main" id="{DDBB0F73-99A4-45C9-B284-8896973CD112}"/>
+                <a16:creationId xmlns:a16="http://schemas.microsoft.com/office/drawing/2014/main" id="{6346D7F8-F33F-4403-908A-AD4154531817}"/>
               </a:ext>
             </a:extLst>
           </p:cNvPr>
@@ -3992,7 +3992,7 @@
           <p:cNvPr id="15" name="">
             <a:extLst xmlns:a="http://schemas.openxmlformats.org/drawingml/2006/main">
               <a:ext uri="{FF2B5EF4-FFF2-40B4-BE49-F238E27FC236}">
-                <a16:creationId xmlns:a16="http://schemas.microsoft.com/office/drawing/2014/main" id="{54A1A30F-BDD9-45A2-A38E-FF8AC7ED2AFD}"/>
+                <a16:creationId xmlns:a16="http://schemas.microsoft.com/office/drawing/2014/main" id="{F19F6E97-CE8C-4336-A790-3E637AA00D90}"/>
               </a:ext>
             </a:extLst>
           </p:cNvPr>
@@ -4026,7 +4026,7 @@
           <p:cNvPr id="16" name="">
             <a:extLst xmlns:a="http://schemas.openxmlformats.org/drawingml/2006/main">
               <a:ext uri="{FF2B5EF4-FFF2-40B4-BE49-F238E27FC236}">
-                <a16:creationId xmlns:a16="http://schemas.microsoft.com/office/drawing/2014/main" id="{7D7BBC9B-C264-4ABE-A789-01F6EA531F89}"/>
+                <a16:creationId xmlns:a16="http://schemas.microsoft.com/office/drawing/2014/main" id="{CE5AC1B8-63F8-4C45-ACE0-C9E579684435}"/>
               </a:ext>
             </a:extLst>
           </p:cNvPr>
@@ -4083,7 +4083,7 @@
           <p:cNvPr id="17" name="">
             <a:extLst xmlns:a="http://schemas.openxmlformats.org/drawingml/2006/main">
               <a:ext uri="{FF2B5EF4-FFF2-40B4-BE49-F238E27FC236}">
-                <a16:creationId xmlns:a16="http://schemas.microsoft.com/office/drawing/2014/main" id="{8279EB7B-2753-433A-8AFD-AB950A3B49A6}"/>
+                <a16:creationId xmlns:a16="http://schemas.microsoft.com/office/drawing/2014/main" id="{424D334D-79C5-483B-AC00-9A15EC5C7182}"/>
               </a:ext>
             </a:extLst>
           </p:cNvPr>
@@ -4140,7 +4140,7 @@
           <p:cNvPr id="18" name="">
             <a:extLst xmlns:a="http://schemas.openxmlformats.org/drawingml/2006/main">
               <a:ext uri="{FF2B5EF4-FFF2-40B4-BE49-F238E27FC236}">
-                <a16:creationId xmlns:a16="http://schemas.microsoft.com/office/drawing/2014/main" id="{A309B7FE-890A-4F2F-B1A5-740474043BDE}"/>
+                <a16:creationId xmlns:a16="http://schemas.microsoft.com/office/drawing/2014/main" id="{B9B09D18-5DD4-4A70-A3A6-ED08F726BB23}"/>
               </a:ext>
             </a:extLst>
           </p:cNvPr>
@@ -4195,7 +4195,7 @@
     </p:spTree>
     <p:extLst>
       <p:ext uri="{BB962C8B-B14F-4D97-AF65-F5344CB8AC3E}">
-        <p14:creationId xmlns:p14="http://schemas.microsoft.com/office/powerpoint/2010/main" val="2100034968"/>
+        <p14:creationId xmlns:p14="http://schemas.microsoft.com/office/powerpoint/2010/main" val="849166703"/>
       </p:ext>
     </p:extLst>
   </p:cSld>
@@ -4350,7 +4350,7 @@
           <p:cNvPr id="23" name="">
             <a:extLst xmlns:a="http://schemas.openxmlformats.org/drawingml/2006/main">
               <a:ext uri="{FF2B5EF4-FFF2-40B4-BE49-F238E27FC236}">
-                <a16:creationId xmlns:a16="http://schemas.microsoft.com/office/drawing/2014/main" id="{9800ABD9-CE9D-48AD-9C3B-62FCFED9FF06}"/>
+                <a16:creationId xmlns:a16="http://schemas.microsoft.com/office/drawing/2014/main" id="{C1DB85A5-5811-4A5D-BEC0-97DEAF1DAC93}"/>
               </a:ext>
             </a:extLst>
           </p:cNvPr>
@@ -4382,7 +4382,7 @@
           <p:cNvPr id="2" name="">
             <a:extLst xmlns:a="http://schemas.openxmlformats.org/drawingml/2006/main">
               <a:ext uri="{FF2B5EF4-FFF2-40B4-BE49-F238E27FC236}">
-                <a16:creationId xmlns:a16="http://schemas.microsoft.com/office/drawing/2014/main" id="{062303CE-318F-42F4-99D6-711CE1F6B70A}"/>
+                <a16:creationId xmlns:a16="http://schemas.microsoft.com/office/drawing/2014/main" id="{FB84DDEC-C3CC-4764-A550-55AA5BBB48D7}"/>
               </a:ext>
             </a:extLst>
           </p:cNvPr>
@@ -4439,7 +4439,7 @@
           <p:cNvPr id="3" name="">
             <a:extLst xmlns:a="http://schemas.openxmlformats.org/drawingml/2006/main">
               <a:ext uri="{FF2B5EF4-FFF2-40B4-BE49-F238E27FC236}">
-                <a16:creationId xmlns:a16="http://schemas.microsoft.com/office/drawing/2014/main" id="{C460C760-FF22-49AB-9C26-A7072F46641C}"/>
+                <a16:creationId xmlns:a16="http://schemas.microsoft.com/office/drawing/2014/main" id="{64F9A2FF-707A-4081-A97B-5AE1764D4766}"/>
               </a:ext>
             </a:extLst>
           </p:cNvPr>
@@ -4471,7 +4471,7 @@
           <p:cNvPr id="4" name="">
             <a:extLst xmlns:a="http://schemas.openxmlformats.org/drawingml/2006/main">
               <a:ext uri="{FF2B5EF4-FFF2-40B4-BE49-F238E27FC236}">
-                <a16:creationId xmlns:a16="http://schemas.microsoft.com/office/drawing/2014/main" id="{323430F3-A693-40E8-9088-043706B28F27}"/>
+                <a16:creationId xmlns:a16="http://schemas.microsoft.com/office/drawing/2014/main" id="{EA3CD80E-59FA-445F-8AF1-2CDCD070B8A9}"/>
               </a:ext>
             </a:extLst>
           </p:cNvPr>
@@ -4528,7 +4528,7 @@
           <p:cNvPr id="5" name="">
             <a:extLst xmlns:a="http://schemas.openxmlformats.org/drawingml/2006/main">
               <a:ext uri="{FF2B5EF4-FFF2-40B4-BE49-F238E27FC236}">
-                <a16:creationId xmlns:a16="http://schemas.microsoft.com/office/drawing/2014/main" id="{F34EAA7E-1359-41C2-AD2C-0042B2E6DA86}"/>
+                <a16:creationId xmlns:a16="http://schemas.microsoft.com/office/drawing/2014/main" id="{C58A2720-BE8F-4F13-AABA-CE7BF40765CF}"/>
               </a:ext>
             </a:extLst>
           </p:cNvPr>
@@ -4585,7 +4585,7 @@
           <p:cNvPr id="6" name="">
             <a:extLst xmlns:a="http://schemas.openxmlformats.org/drawingml/2006/main">
               <a:ext uri="{FF2B5EF4-FFF2-40B4-BE49-F238E27FC236}">
-                <a16:creationId xmlns:a16="http://schemas.microsoft.com/office/drawing/2014/main" id="{8707EEDE-E4EF-4CB9-BC4C-1FFABFA4AF3C}"/>
+                <a16:creationId xmlns:a16="http://schemas.microsoft.com/office/drawing/2014/main" id="{5505EA0F-C725-4974-8F61-A458D6F3DB66}"/>
               </a:ext>
             </a:extLst>
           </p:cNvPr>
@@ -4642,7 +4642,7 @@
           <p:cNvPr id="7" name="">
             <a:extLst xmlns:a="http://schemas.openxmlformats.org/drawingml/2006/main">
               <a:ext uri="{FF2B5EF4-FFF2-40B4-BE49-F238E27FC236}">
-                <a16:creationId xmlns:a16="http://schemas.microsoft.com/office/drawing/2014/main" id="{FC49E2B1-03B8-46D9-9661-3BB235703BCF}"/>
+                <a16:creationId xmlns:a16="http://schemas.microsoft.com/office/drawing/2014/main" id="{1700F6FD-7A8A-407C-AF0E-D3DDC1EFD17E}"/>
               </a:ext>
             </a:extLst>
           </p:cNvPr>
@@ -4674,7 +4674,7 @@
           <p:cNvPr id="8" name="">
             <a:extLst xmlns:a="http://schemas.openxmlformats.org/drawingml/2006/main">
               <a:ext uri="{FF2B5EF4-FFF2-40B4-BE49-F238E27FC236}">
-                <a16:creationId xmlns:a16="http://schemas.microsoft.com/office/drawing/2014/main" id="{B75DB427-C78D-41E2-9062-17E8D8EA4955}"/>
+                <a16:creationId xmlns:a16="http://schemas.microsoft.com/office/drawing/2014/main" id="{3F1BBA58-A437-413D-B934-133BEA80A965}"/>
               </a:ext>
             </a:extLst>
           </p:cNvPr>
@@ -4731,7 +4731,7 @@
           <p:cNvPr id="9" name="">
             <a:extLst xmlns:a="http://schemas.openxmlformats.org/drawingml/2006/main">
               <a:ext uri="{FF2B5EF4-FFF2-40B4-BE49-F238E27FC236}">
-                <a16:creationId xmlns:a16="http://schemas.microsoft.com/office/drawing/2014/main" id="{7900912D-C5BB-4C04-A04D-A5AA5152A876}"/>
+                <a16:creationId xmlns:a16="http://schemas.microsoft.com/office/drawing/2014/main" id="{91AAC5FF-D85F-4DB3-B77C-4555B28FA190}"/>
               </a:ext>
             </a:extLst>
           </p:cNvPr>
@@ -4788,7 +4788,7 @@
           <p:cNvPr id="10" name="">
             <a:extLst xmlns:a="http://schemas.openxmlformats.org/drawingml/2006/main">
               <a:ext uri="{FF2B5EF4-FFF2-40B4-BE49-F238E27FC236}">
-                <a16:creationId xmlns:a16="http://schemas.microsoft.com/office/drawing/2014/main" id="{3404FA17-36C9-4BAE-B669-0FB82DACC138}"/>
+                <a16:creationId xmlns:a16="http://schemas.microsoft.com/office/drawing/2014/main" id="{EECD948D-3537-45BB-BC81-802D184BF1DF}"/>
               </a:ext>
             </a:extLst>
           </p:cNvPr>
@@ -4822,7 +4822,7 @@
           <p:cNvPr id="11" name="">
             <a:extLst xmlns:a="http://schemas.openxmlformats.org/drawingml/2006/main">
               <a:ext uri="{FF2B5EF4-FFF2-40B4-BE49-F238E27FC236}">
-                <a16:creationId xmlns:a16="http://schemas.microsoft.com/office/drawing/2014/main" id="{BD8E4E55-8548-44B5-8CA7-B0C0E4AFEABD}"/>
+                <a16:creationId xmlns:a16="http://schemas.microsoft.com/office/drawing/2014/main" id="{548CF107-BFAC-4CAD-8264-6285FA9C85B8}"/>
               </a:ext>
             </a:extLst>
           </p:cNvPr>
@@ -4854,7 +4854,7 @@
           <p:cNvPr id="12" name="">
             <a:extLst xmlns:a="http://schemas.openxmlformats.org/drawingml/2006/main">
               <a:ext uri="{FF2B5EF4-FFF2-40B4-BE49-F238E27FC236}">
-                <a16:creationId xmlns:a16="http://schemas.microsoft.com/office/drawing/2014/main" id="{E76E15BE-B56F-441A-894F-BED6D91216C0}"/>
+                <a16:creationId xmlns:a16="http://schemas.microsoft.com/office/drawing/2014/main" id="{28657050-341E-4697-8F68-7EBD3D838E31}"/>
               </a:ext>
             </a:extLst>
           </p:cNvPr>
@@ -4911,7 +4911,7 @@
           <p:cNvPr id="13" name="">
             <a:extLst xmlns:a="http://schemas.openxmlformats.org/drawingml/2006/main">
               <a:ext uri="{FF2B5EF4-FFF2-40B4-BE49-F238E27FC236}">
-                <a16:creationId xmlns:a16="http://schemas.microsoft.com/office/drawing/2014/main" id="{C7B6BA68-7EE1-46AD-B575-0CEB1E2EC2F1}"/>
+                <a16:creationId xmlns:a16="http://schemas.microsoft.com/office/drawing/2014/main" id="{084DC79D-7EE6-4558-9C9C-993C1890D904}"/>
               </a:ext>
             </a:extLst>
           </p:cNvPr>
@@ -4968,7 +4968,7 @@
           <p:cNvPr id="14" name="">
             <a:extLst xmlns:a="http://schemas.openxmlformats.org/drawingml/2006/main">
               <a:ext uri="{FF2B5EF4-FFF2-40B4-BE49-F238E27FC236}">
-                <a16:creationId xmlns:a16="http://schemas.microsoft.com/office/drawing/2014/main" id="{76E5C5E8-B08D-46F9-92DC-E7B79346F269}"/>
+                <a16:creationId xmlns:a16="http://schemas.microsoft.com/office/drawing/2014/main" id="{99957B38-152D-47B3-B3F4-038982425A25}"/>
               </a:ext>
             </a:extLst>
           </p:cNvPr>
@@ -5002,7 +5002,7 @@
           <p:cNvPr id="15" name="">
             <a:extLst xmlns:a="http://schemas.openxmlformats.org/drawingml/2006/main">
               <a:ext uri="{FF2B5EF4-FFF2-40B4-BE49-F238E27FC236}">
-                <a16:creationId xmlns:a16="http://schemas.microsoft.com/office/drawing/2014/main" id="{3C39E6A0-D837-4D8B-95F9-992D346D34ED}"/>
+                <a16:creationId xmlns:a16="http://schemas.microsoft.com/office/drawing/2014/main" id="{767ED196-6AC5-469D-9D52-88D719190375}"/>
               </a:ext>
             </a:extLst>
           </p:cNvPr>
@@ -5034,7 +5034,7 @@
           <p:cNvPr id="16" name="">
             <a:extLst xmlns:a="http://schemas.openxmlformats.org/drawingml/2006/main">
               <a:ext uri="{FF2B5EF4-FFF2-40B4-BE49-F238E27FC236}">
-                <a16:creationId xmlns:a16="http://schemas.microsoft.com/office/drawing/2014/main" id="{343F4A07-1595-4314-81D8-6A8D960A7E29}"/>
+                <a16:creationId xmlns:a16="http://schemas.microsoft.com/office/drawing/2014/main" id="{48124D83-E897-4762-AD34-F1D895D6E7DB}"/>
               </a:ext>
             </a:extLst>
           </p:cNvPr>
@@ -5091,7 +5091,7 @@
           <p:cNvPr id="17" name="">
             <a:extLst xmlns:a="http://schemas.openxmlformats.org/drawingml/2006/main">
               <a:ext uri="{FF2B5EF4-FFF2-40B4-BE49-F238E27FC236}">
-                <a16:creationId xmlns:a16="http://schemas.microsoft.com/office/drawing/2014/main" id="{FCE6A1AA-D867-4F19-9C14-D1649CCA6892}"/>
+                <a16:creationId xmlns:a16="http://schemas.microsoft.com/office/drawing/2014/main" id="{EC975C81-EE61-415A-9999-8DD42794A0A8}"/>
               </a:ext>
             </a:extLst>
           </p:cNvPr>
@@ -5148,7 +5148,7 @@
           <p:cNvPr id="18" name="">
             <a:extLst xmlns:a="http://schemas.openxmlformats.org/drawingml/2006/main">
               <a:ext uri="{FF2B5EF4-FFF2-40B4-BE49-F238E27FC236}">
-                <a16:creationId xmlns:a16="http://schemas.microsoft.com/office/drawing/2014/main" id="{471716F0-8F02-4E30-ADE2-F01E88689D0F}"/>
+                <a16:creationId xmlns:a16="http://schemas.microsoft.com/office/drawing/2014/main" id="{6B7EDC51-E0E9-4917-80BD-95D4F65E858A}"/>
               </a:ext>
             </a:extLst>
           </p:cNvPr>
@@ -5182,7 +5182,7 @@
           <p:cNvPr id="19" name="">
             <a:extLst xmlns:a="http://schemas.openxmlformats.org/drawingml/2006/main">
               <a:ext uri="{FF2B5EF4-FFF2-40B4-BE49-F238E27FC236}">
-                <a16:creationId xmlns:a16="http://schemas.microsoft.com/office/drawing/2014/main" id="{3C3E6C80-BEFF-4EF5-A1D1-461492462A08}"/>
+                <a16:creationId xmlns:a16="http://schemas.microsoft.com/office/drawing/2014/main" id="{9A2BF52A-BE4C-4D8F-BE08-5F179DF3572C}"/>
               </a:ext>
             </a:extLst>
           </p:cNvPr>
@@ -5214,7 +5214,7 @@
           <p:cNvPr id="20" name="">
             <a:extLst xmlns:a="http://schemas.openxmlformats.org/drawingml/2006/main">
               <a:ext uri="{FF2B5EF4-FFF2-40B4-BE49-F238E27FC236}">
-                <a16:creationId xmlns:a16="http://schemas.microsoft.com/office/drawing/2014/main" id="{C55E4759-570B-4117-B270-B28332B8C162}"/>
+                <a16:creationId xmlns:a16="http://schemas.microsoft.com/office/drawing/2014/main" id="{E4AF48C0-2DDF-48CE-BE2B-D86E5CC1B303}"/>
               </a:ext>
             </a:extLst>
           </p:cNvPr>
@@ -5271,7 +5271,7 @@
           <p:cNvPr id="21" name="">
             <a:extLst xmlns:a="http://schemas.openxmlformats.org/drawingml/2006/main">
               <a:ext uri="{FF2B5EF4-FFF2-40B4-BE49-F238E27FC236}">
-                <a16:creationId xmlns:a16="http://schemas.microsoft.com/office/drawing/2014/main" id="{13E7CBB5-D388-4EF8-8BE3-DF711B7F3863}"/>
+                <a16:creationId xmlns:a16="http://schemas.microsoft.com/office/drawing/2014/main" id="{5F4CF6BD-488D-4EC3-A292-628DDEA13BE8}"/>
               </a:ext>
             </a:extLst>
           </p:cNvPr>
@@ -5328,7 +5328,7 @@
           <p:cNvPr id="22" name="">
             <a:extLst xmlns:a="http://schemas.openxmlformats.org/drawingml/2006/main">
               <a:ext uri="{FF2B5EF4-FFF2-40B4-BE49-F238E27FC236}">
-                <a16:creationId xmlns:a16="http://schemas.microsoft.com/office/drawing/2014/main" id="{740EED9C-E4BF-47D7-9838-BE126D01EC4D}"/>
+                <a16:creationId xmlns:a16="http://schemas.microsoft.com/office/drawing/2014/main" id="{5B3FAD35-D705-4885-A6FB-A8FA45CDF4F9}"/>
               </a:ext>
             </a:extLst>
           </p:cNvPr>
@@ -5383,7 +5383,7 @@
     </p:spTree>
     <p:extLst>
       <p:ext uri="{BB962C8B-B14F-4D97-AF65-F5344CB8AC3E}">
-        <p14:creationId xmlns:p14="http://schemas.microsoft.com/office/powerpoint/2010/main" val="1454012568"/>
+        <p14:creationId xmlns:p14="http://schemas.microsoft.com/office/powerpoint/2010/main" val="192083382"/>
       </p:ext>
     </p:extLst>
   </p:cSld>
@@ -5584,7 +5584,7 @@
           <p:cNvPr id="23" name="">
             <a:extLst xmlns:a="http://schemas.openxmlformats.org/drawingml/2006/main">
               <a:ext uri="{FF2B5EF4-FFF2-40B4-BE49-F238E27FC236}">
-                <a16:creationId xmlns:a16="http://schemas.microsoft.com/office/drawing/2014/main" id="{51ABC1AB-7BE8-4515-8F94-3427E23B8FA3}"/>
+                <a16:creationId xmlns:a16="http://schemas.microsoft.com/office/drawing/2014/main" id="{F91EBC84-1644-4D78-8835-B70A065386C6}"/>
               </a:ext>
             </a:extLst>
           </p:cNvPr>
@@ -5616,7 +5616,7 @@
           <p:cNvPr id="2" name="">
             <a:extLst xmlns:a="http://schemas.openxmlformats.org/drawingml/2006/main">
               <a:ext uri="{FF2B5EF4-FFF2-40B4-BE49-F238E27FC236}">
-                <a16:creationId xmlns:a16="http://schemas.microsoft.com/office/drawing/2014/main" id="{400F3062-1E3A-4328-9AEA-03FC7C1A805A}"/>
+                <a16:creationId xmlns:a16="http://schemas.microsoft.com/office/drawing/2014/main" id="{474987CE-06CE-4CE9-8B1F-C436CDB42C7B}"/>
               </a:ext>
             </a:extLst>
           </p:cNvPr>
@@ -5673,7 +5673,7 @@
           <p:cNvPr id="3" name="">
             <a:extLst xmlns:a="http://schemas.openxmlformats.org/drawingml/2006/main">
               <a:ext uri="{FF2B5EF4-FFF2-40B4-BE49-F238E27FC236}">
-                <a16:creationId xmlns:a16="http://schemas.microsoft.com/office/drawing/2014/main" id="{CBA45008-DFE5-4BAE-9A58-0A42A4E32FFB}"/>
+                <a16:creationId xmlns:a16="http://schemas.microsoft.com/office/drawing/2014/main" id="{D68AFC80-94F5-43F5-B6F9-C97F8260311D}"/>
               </a:ext>
             </a:extLst>
           </p:cNvPr>
@@ -5705,7 +5705,7 @@
           <p:cNvPr id="4" name="">
             <a:extLst xmlns:a="http://schemas.openxmlformats.org/drawingml/2006/main">
               <a:ext uri="{FF2B5EF4-FFF2-40B4-BE49-F238E27FC236}">
-                <a16:creationId xmlns:a16="http://schemas.microsoft.com/office/drawing/2014/main" id="{0FB7C1B6-8C31-4376-8E03-8EC31FCD11ED}"/>
+                <a16:creationId xmlns:a16="http://schemas.microsoft.com/office/drawing/2014/main" id="{FC8549FB-336D-47B5-9039-BAEF1689EFA8}"/>
               </a:ext>
             </a:extLst>
           </p:cNvPr>
@@ -5762,7 +5762,7 @@
           <p:cNvPr id="5" name="">
             <a:extLst xmlns:a="http://schemas.openxmlformats.org/drawingml/2006/main">
               <a:ext uri="{FF2B5EF4-FFF2-40B4-BE49-F238E27FC236}">
-                <a16:creationId xmlns:a16="http://schemas.microsoft.com/office/drawing/2014/main" id="{CA41E793-9B55-4632-99E6-E29116683AF5}"/>
+                <a16:creationId xmlns:a16="http://schemas.microsoft.com/office/drawing/2014/main" id="{1EA9ED8B-F12A-4517-81DC-F5506EF84C10}"/>
               </a:ext>
             </a:extLst>
           </p:cNvPr>
@@ -5819,7 +5819,7 @@
           <p:cNvPr id="6" name="">
             <a:extLst xmlns:a="http://schemas.openxmlformats.org/drawingml/2006/main">
               <a:ext uri="{FF2B5EF4-FFF2-40B4-BE49-F238E27FC236}">
-                <a16:creationId xmlns:a16="http://schemas.microsoft.com/office/drawing/2014/main" id="{11D40286-7ACB-4E27-A9BA-B8F8D6768A66}"/>
+                <a16:creationId xmlns:a16="http://schemas.microsoft.com/office/drawing/2014/main" id="{3E6DA7D1-5AD4-4668-9646-56E74DEBAB88}"/>
               </a:ext>
             </a:extLst>
           </p:cNvPr>
@@ -5876,7 +5876,7 @@
           <p:cNvPr id="7" name="">
             <a:extLst xmlns:a="http://schemas.openxmlformats.org/drawingml/2006/main">
               <a:ext uri="{FF2B5EF4-FFF2-40B4-BE49-F238E27FC236}">
-                <a16:creationId xmlns:a16="http://schemas.microsoft.com/office/drawing/2014/main" id="{B8D15A70-C18E-4ADF-8FF7-BF5C18241A11}"/>
+                <a16:creationId xmlns:a16="http://schemas.microsoft.com/office/drawing/2014/main" id="{8A62691C-2EFC-43FC-8292-14C37CCDA579}"/>
               </a:ext>
             </a:extLst>
           </p:cNvPr>
@@ -5908,7 +5908,7 @@
           <p:cNvPr id="8" name="">
             <a:extLst xmlns:a="http://schemas.openxmlformats.org/drawingml/2006/main">
               <a:ext uri="{FF2B5EF4-FFF2-40B4-BE49-F238E27FC236}">
-                <a16:creationId xmlns:a16="http://schemas.microsoft.com/office/drawing/2014/main" id="{DDAED39F-3760-439B-BEA4-32D0AB45843A}"/>
+                <a16:creationId xmlns:a16="http://schemas.microsoft.com/office/drawing/2014/main" id="{70E09644-D508-47F5-947D-298E4869664D}"/>
               </a:ext>
             </a:extLst>
           </p:cNvPr>
@@ -5965,7 +5965,7 @@
           <p:cNvPr id="9" name="">
             <a:extLst xmlns:a="http://schemas.openxmlformats.org/drawingml/2006/main">
               <a:ext uri="{FF2B5EF4-FFF2-40B4-BE49-F238E27FC236}">
-                <a16:creationId xmlns:a16="http://schemas.microsoft.com/office/drawing/2014/main" id="{1C1C029B-AFF9-4E7D-A2BD-D17CE702B960}"/>
+                <a16:creationId xmlns:a16="http://schemas.microsoft.com/office/drawing/2014/main" id="{B0EFD8A9-4A75-4756-9DD9-A514E6C04EBB}"/>
               </a:ext>
             </a:extLst>
           </p:cNvPr>
@@ -6022,7 +6022,7 @@
           <p:cNvPr id="10" name="">
             <a:extLst xmlns:a="http://schemas.openxmlformats.org/drawingml/2006/main">
               <a:ext uri="{FF2B5EF4-FFF2-40B4-BE49-F238E27FC236}">
-                <a16:creationId xmlns:a16="http://schemas.microsoft.com/office/drawing/2014/main" id="{1749EDE6-0EB0-4D08-9DC5-E3E878DE2ABC}"/>
+                <a16:creationId xmlns:a16="http://schemas.microsoft.com/office/drawing/2014/main" id="{3333994A-A51D-4B10-AB75-00612AB61006}"/>
               </a:ext>
             </a:extLst>
           </p:cNvPr>
@@ -6056,7 +6056,7 @@
           <p:cNvPr id="11" name="">
             <a:extLst xmlns:a="http://schemas.openxmlformats.org/drawingml/2006/main">
               <a:ext uri="{FF2B5EF4-FFF2-40B4-BE49-F238E27FC236}">
-                <a16:creationId xmlns:a16="http://schemas.microsoft.com/office/drawing/2014/main" id="{5E9AFF2B-FD19-49AA-A707-63BDC63D0A23}"/>
+                <a16:creationId xmlns:a16="http://schemas.microsoft.com/office/drawing/2014/main" id="{19F02151-05E3-4B21-B44A-692AD5E8CCF3}"/>
               </a:ext>
             </a:extLst>
           </p:cNvPr>
@@ -6088,7 +6088,7 @@
           <p:cNvPr id="12" name="">
             <a:extLst xmlns:a="http://schemas.openxmlformats.org/drawingml/2006/main">
               <a:ext uri="{FF2B5EF4-FFF2-40B4-BE49-F238E27FC236}">
-                <a16:creationId xmlns:a16="http://schemas.microsoft.com/office/drawing/2014/main" id="{EBE22201-6FB1-40C5-BD57-1D05A583F26B}"/>
+                <a16:creationId xmlns:a16="http://schemas.microsoft.com/office/drawing/2014/main" id="{9D443E8A-65F0-4A85-BA06-57F79A63C260}"/>
               </a:ext>
             </a:extLst>
           </p:cNvPr>
@@ -6145,7 +6145,7 @@
           <p:cNvPr id="13" name="">
             <a:extLst xmlns:a="http://schemas.openxmlformats.org/drawingml/2006/main">
               <a:ext uri="{FF2B5EF4-FFF2-40B4-BE49-F238E27FC236}">
-                <a16:creationId xmlns:a16="http://schemas.microsoft.com/office/drawing/2014/main" id="{69F9F187-B110-42B9-AD93-C76515C061C4}"/>
+                <a16:creationId xmlns:a16="http://schemas.microsoft.com/office/drawing/2014/main" id="{EFD36579-489C-4853-8481-A45B4FB3D72E}"/>
               </a:ext>
             </a:extLst>
           </p:cNvPr>
@@ -6202,7 +6202,7 @@
           <p:cNvPr id="14" name="">
             <a:extLst xmlns:a="http://schemas.openxmlformats.org/drawingml/2006/main">
               <a:ext uri="{FF2B5EF4-FFF2-40B4-BE49-F238E27FC236}">
-                <a16:creationId xmlns:a16="http://schemas.microsoft.com/office/drawing/2014/main" id="{2CA86855-1476-41FA-B21F-E936BB6D0FDB}"/>
+                <a16:creationId xmlns:a16="http://schemas.microsoft.com/office/drawing/2014/main" id="{40A16DF3-910A-4447-931F-26E211528C6B}"/>
               </a:ext>
             </a:extLst>
           </p:cNvPr>
@@ -6236,7 +6236,7 @@
           <p:cNvPr id="15" name="">
             <a:extLst xmlns:a="http://schemas.openxmlformats.org/drawingml/2006/main">
               <a:ext uri="{FF2B5EF4-FFF2-40B4-BE49-F238E27FC236}">
-                <a16:creationId xmlns:a16="http://schemas.microsoft.com/office/drawing/2014/main" id="{096E834F-74BE-4171-A95A-6F2CE106A980}"/>
+                <a16:creationId xmlns:a16="http://schemas.microsoft.com/office/drawing/2014/main" id="{BC3E577B-94E5-4003-B18C-2FCAC3C63B9E}"/>
               </a:ext>
             </a:extLst>
           </p:cNvPr>
@@ -6268,7 +6268,7 @@
           <p:cNvPr id="16" name="">
             <a:extLst xmlns:a="http://schemas.openxmlformats.org/drawingml/2006/main">
               <a:ext uri="{FF2B5EF4-FFF2-40B4-BE49-F238E27FC236}">
-                <a16:creationId xmlns:a16="http://schemas.microsoft.com/office/drawing/2014/main" id="{5A31382A-2DB1-454D-931F-F61D3520E403}"/>
+                <a16:creationId xmlns:a16="http://schemas.microsoft.com/office/drawing/2014/main" id="{BA024AA0-8402-4F2A-9189-51CA96D3BA46}"/>
               </a:ext>
             </a:extLst>
           </p:cNvPr>
@@ -6325,7 +6325,7 @@
           <p:cNvPr id="17" name="">
             <a:extLst xmlns:a="http://schemas.openxmlformats.org/drawingml/2006/main">
               <a:ext uri="{FF2B5EF4-FFF2-40B4-BE49-F238E27FC236}">
-                <a16:creationId xmlns:a16="http://schemas.microsoft.com/office/drawing/2014/main" id="{0EC50A77-0516-4236-83C0-371B008F9970}"/>
+                <a16:creationId xmlns:a16="http://schemas.microsoft.com/office/drawing/2014/main" id="{391A5169-10CC-41B2-8E0D-1D912A78CE08}"/>
               </a:ext>
             </a:extLst>
           </p:cNvPr>
@@ -6382,7 +6382,7 @@
           <p:cNvPr id="18" name="">
             <a:extLst xmlns:a="http://schemas.openxmlformats.org/drawingml/2006/main">
               <a:ext uri="{FF2B5EF4-FFF2-40B4-BE49-F238E27FC236}">
-                <a16:creationId xmlns:a16="http://schemas.microsoft.com/office/drawing/2014/main" id="{51FA701C-07F6-4E10-9881-42FEA010560B}"/>
+                <a16:creationId xmlns:a16="http://schemas.microsoft.com/office/drawing/2014/main" id="{1162A72B-682A-4FB5-B566-DDCCEA8F234B}"/>
               </a:ext>
             </a:extLst>
           </p:cNvPr>
@@ -6416,7 +6416,7 @@
           <p:cNvPr id="19" name="">
             <a:extLst xmlns:a="http://schemas.openxmlformats.org/drawingml/2006/main">
               <a:ext uri="{FF2B5EF4-FFF2-40B4-BE49-F238E27FC236}">
-                <a16:creationId xmlns:a16="http://schemas.microsoft.com/office/drawing/2014/main" id="{B22982B6-7259-438C-9733-D187C7B99DD0}"/>
+                <a16:creationId xmlns:a16="http://schemas.microsoft.com/office/drawing/2014/main" id="{2948D798-A7E2-4E01-B552-73B405D4355C}"/>
               </a:ext>
             </a:extLst>
           </p:cNvPr>
@@ -6448,7 +6448,7 @@
           <p:cNvPr id="20" name="">
             <a:extLst xmlns:a="http://schemas.openxmlformats.org/drawingml/2006/main">
               <a:ext uri="{FF2B5EF4-FFF2-40B4-BE49-F238E27FC236}">
-                <a16:creationId xmlns:a16="http://schemas.microsoft.com/office/drawing/2014/main" id="{49D2E79D-789E-40EA-B25C-E94C3DD8FE05}"/>
+                <a16:creationId xmlns:a16="http://schemas.microsoft.com/office/drawing/2014/main" id="{2A825758-6923-4850-8CFE-B231EF159C38}"/>
               </a:ext>
             </a:extLst>
           </p:cNvPr>
@@ -6505,7 +6505,7 @@
           <p:cNvPr id="21" name="">
             <a:extLst xmlns:a="http://schemas.openxmlformats.org/drawingml/2006/main">
               <a:ext uri="{FF2B5EF4-FFF2-40B4-BE49-F238E27FC236}">
-                <a16:creationId xmlns:a16="http://schemas.microsoft.com/office/drawing/2014/main" id="{0A7B3310-2045-4A27-AEAB-D499A7D0D3C2}"/>
+                <a16:creationId xmlns:a16="http://schemas.microsoft.com/office/drawing/2014/main" id="{C30EF267-9C1D-44B4-9624-11846258B01C}"/>
               </a:ext>
             </a:extLst>
           </p:cNvPr>
@@ -6562,7 +6562,7 @@
           <p:cNvPr id="22" name="">
             <a:extLst xmlns:a="http://schemas.openxmlformats.org/drawingml/2006/main">
               <a:ext uri="{FF2B5EF4-FFF2-40B4-BE49-F238E27FC236}">
-                <a16:creationId xmlns:a16="http://schemas.microsoft.com/office/drawing/2014/main" id="{F31592EF-EBEB-4830-A6FC-676AFB8CB879}"/>
+                <a16:creationId xmlns:a16="http://schemas.microsoft.com/office/drawing/2014/main" id="{926152D0-4A87-4C11-8775-9EF5D4DC188F}"/>
               </a:ext>
             </a:extLst>
           </p:cNvPr>
@@ -6617,7 +6617,7 @@
     </p:spTree>
     <p:extLst>
       <p:ext uri="{BB962C8B-B14F-4D97-AF65-F5344CB8AC3E}">
-        <p14:creationId xmlns:p14="http://schemas.microsoft.com/office/powerpoint/2010/main" val="1336474893"/>
+        <p14:creationId xmlns:p14="http://schemas.microsoft.com/office/powerpoint/2010/main" val="1282124405"/>
       </p:ext>
     </p:extLst>
   </p:cSld>
@@ -6818,7 +6818,7 @@
           <p:cNvPr id="16" name="">
             <a:extLst xmlns:a="http://schemas.openxmlformats.org/drawingml/2006/main">
               <a:ext uri="{FF2B5EF4-FFF2-40B4-BE49-F238E27FC236}">
-                <a16:creationId xmlns:a16="http://schemas.microsoft.com/office/drawing/2014/main" id="{B9F18047-9F54-4C64-B8A5-EB81C1421AEB}"/>
+                <a16:creationId xmlns:a16="http://schemas.microsoft.com/office/drawing/2014/main" id="{96F33F37-F95A-448B-A02D-1B80235946C4}"/>
               </a:ext>
             </a:extLst>
           </p:cNvPr>
@@ -6850,7 +6850,7 @@
           <p:cNvPr id="2" name="">
             <a:extLst xmlns:a="http://schemas.openxmlformats.org/drawingml/2006/main">
               <a:ext uri="{FF2B5EF4-FFF2-40B4-BE49-F238E27FC236}">
-                <a16:creationId xmlns:a16="http://schemas.microsoft.com/office/drawing/2014/main" id="{50A4B571-6005-45A8-806F-8A9D356E5741}"/>
+                <a16:creationId xmlns:a16="http://schemas.microsoft.com/office/drawing/2014/main" id="{3366EDF4-E083-4DC7-A006-DC7DD157571E}"/>
               </a:ext>
             </a:extLst>
           </p:cNvPr>
@@ -6907,7 +6907,7 @@
           <p:cNvPr id="3" name="">
             <a:extLst xmlns:a="http://schemas.openxmlformats.org/drawingml/2006/main">
               <a:ext uri="{FF2B5EF4-FFF2-40B4-BE49-F238E27FC236}">
-                <a16:creationId xmlns:a16="http://schemas.microsoft.com/office/drawing/2014/main" id="{1D04E2CF-3E27-41D1-84A6-373D0979AAFC}"/>
+                <a16:creationId xmlns:a16="http://schemas.microsoft.com/office/drawing/2014/main" id="{B10C2625-87C6-4BC4-A321-69A8FBEDBBA7}"/>
               </a:ext>
             </a:extLst>
           </p:cNvPr>
@@ -6939,7 +6939,7 @@
           <p:cNvPr id="4" name="">
             <a:extLst xmlns:a="http://schemas.openxmlformats.org/drawingml/2006/main">
               <a:ext uri="{FF2B5EF4-FFF2-40B4-BE49-F238E27FC236}">
-                <a16:creationId xmlns:a16="http://schemas.microsoft.com/office/drawing/2014/main" id="{90762F99-27E5-463B-AB4A-37C07CAE8458}"/>
+                <a16:creationId xmlns:a16="http://schemas.microsoft.com/office/drawing/2014/main" id="{5C98E0E6-E2FA-45DA-AA38-FDF599864A44}"/>
               </a:ext>
             </a:extLst>
           </p:cNvPr>
@@ -6996,7 +6996,7 @@
           <p:cNvPr id="5" name="">
             <a:extLst xmlns:a="http://schemas.openxmlformats.org/drawingml/2006/main">
               <a:ext uri="{FF2B5EF4-FFF2-40B4-BE49-F238E27FC236}">
-                <a16:creationId xmlns:a16="http://schemas.microsoft.com/office/drawing/2014/main" id="{C3C9FC28-D1A3-4BDA-B88A-39E0930A8A64}"/>
+                <a16:creationId xmlns:a16="http://schemas.microsoft.com/office/drawing/2014/main" id="{95C46307-5331-45FD-9EFE-798C9F861D8A}"/>
               </a:ext>
             </a:extLst>
           </p:cNvPr>
@@ -7053,7 +7053,7 @@
           <p:cNvPr id="6" name="">
             <a:extLst xmlns:a="http://schemas.openxmlformats.org/drawingml/2006/main">
               <a:ext uri="{FF2B5EF4-FFF2-40B4-BE49-F238E27FC236}">
-                <a16:creationId xmlns:a16="http://schemas.microsoft.com/office/drawing/2014/main" id="{9CA27603-DFD6-417A-BE7F-0054ED0E66D3}"/>
+                <a16:creationId xmlns:a16="http://schemas.microsoft.com/office/drawing/2014/main" id="{AE09ABEB-918D-4C76-A40D-C159D3C1614F}"/>
               </a:ext>
             </a:extLst>
           </p:cNvPr>
@@ -7110,7 +7110,7 @@
           <p:cNvPr id="7" name="">
             <a:extLst xmlns:a="http://schemas.openxmlformats.org/drawingml/2006/main">
               <a:ext uri="{FF2B5EF4-FFF2-40B4-BE49-F238E27FC236}">
-                <a16:creationId xmlns:a16="http://schemas.microsoft.com/office/drawing/2014/main" id="{8044954A-17B9-4D82-BE8C-F3C9D15E5B97}"/>
+                <a16:creationId xmlns:a16="http://schemas.microsoft.com/office/drawing/2014/main" id="{E309D1EE-FF47-4BAD-9F29-0E1C67A3EBDE}"/>
               </a:ext>
             </a:extLst>
           </p:cNvPr>
@@ -7142,7 +7142,7 @@
           <p:cNvPr id="8" name="">
             <a:extLst xmlns:a="http://schemas.openxmlformats.org/drawingml/2006/main">
               <a:ext uri="{FF2B5EF4-FFF2-40B4-BE49-F238E27FC236}">
-                <a16:creationId xmlns:a16="http://schemas.microsoft.com/office/drawing/2014/main" id="{BCBED40E-779B-4A17-B30F-B90018443272}"/>
+                <a16:creationId xmlns:a16="http://schemas.microsoft.com/office/drawing/2014/main" id="{D2CB7FA8-2D1F-4F3A-85AC-0A9EB0A44BAC}"/>
               </a:ext>
             </a:extLst>
           </p:cNvPr>
@@ -7199,7 +7199,7 @@
           <p:cNvPr id="9" name="">
             <a:extLst xmlns:a="http://schemas.openxmlformats.org/drawingml/2006/main">
               <a:ext uri="{FF2B5EF4-FFF2-40B4-BE49-F238E27FC236}">
-                <a16:creationId xmlns:a16="http://schemas.microsoft.com/office/drawing/2014/main" id="{9D9838DD-483C-4085-920C-722DB5AA2BA6}"/>
+                <a16:creationId xmlns:a16="http://schemas.microsoft.com/office/drawing/2014/main" id="{9E5B9B7C-FC3C-4E21-8512-608FAB7663B4}"/>
               </a:ext>
             </a:extLst>
           </p:cNvPr>
@@ -7256,7 +7256,7 @@
           <p:cNvPr id="10" name="">
             <a:extLst xmlns:a="http://schemas.openxmlformats.org/drawingml/2006/main">
               <a:ext uri="{FF2B5EF4-FFF2-40B4-BE49-F238E27FC236}">
-                <a16:creationId xmlns:a16="http://schemas.microsoft.com/office/drawing/2014/main" id="{F929F445-B393-451F-AF2D-3B21FE3C0FA2}"/>
+                <a16:creationId xmlns:a16="http://schemas.microsoft.com/office/drawing/2014/main" id="{2F127FB2-5AD8-4604-94A9-72E05C4D674E}"/>
               </a:ext>
             </a:extLst>
           </p:cNvPr>
@@ -7313,7 +7313,7 @@
           <p:cNvPr id="11" name="">
             <a:extLst xmlns:a="http://schemas.openxmlformats.org/drawingml/2006/main">
               <a:ext uri="{FF2B5EF4-FFF2-40B4-BE49-F238E27FC236}">
-                <a16:creationId xmlns:a16="http://schemas.microsoft.com/office/drawing/2014/main" id="{60C94314-6BE8-4FBA-AE93-B206A5D5CD41}"/>
+                <a16:creationId xmlns:a16="http://schemas.microsoft.com/office/drawing/2014/main" id="{6F477DDB-A59D-4274-A78B-22487ECD5854}"/>
               </a:ext>
             </a:extLst>
           </p:cNvPr>
@@ -7345,7 +7345,7 @@
           <p:cNvPr id="12" name="">
             <a:extLst xmlns:a="http://schemas.openxmlformats.org/drawingml/2006/main">
               <a:ext uri="{FF2B5EF4-FFF2-40B4-BE49-F238E27FC236}">
-                <a16:creationId xmlns:a16="http://schemas.microsoft.com/office/drawing/2014/main" id="{CF2165C8-AF63-499C-A925-4B5FF5E4DFE4}"/>
+                <a16:creationId xmlns:a16="http://schemas.microsoft.com/office/drawing/2014/main" id="{802590F1-352B-4D13-91EC-5AAC84BC02D5}"/>
               </a:ext>
             </a:extLst>
           </p:cNvPr>
@@ -7402,7 +7402,7 @@
           <p:cNvPr id="13" name="">
             <a:extLst xmlns:a="http://schemas.openxmlformats.org/drawingml/2006/main">
               <a:ext uri="{FF2B5EF4-FFF2-40B4-BE49-F238E27FC236}">
-                <a16:creationId xmlns:a16="http://schemas.microsoft.com/office/drawing/2014/main" id="{AAD1C40B-F915-490E-AE90-344995B2EAC7}"/>
+                <a16:creationId xmlns:a16="http://schemas.microsoft.com/office/drawing/2014/main" id="{D21F20AD-295D-4C34-8A86-7356A1F4F323}"/>
               </a:ext>
             </a:extLst>
           </p:cNvPr>
@@ -7459,7 +7459,7 @@
           <p:cNvPr id="14" name="">
             <a:extLst xmlns:a="http://schemas.openxmlformats.org/drawingml/2006/main">
               <a:ext uri="{FF2B5EF4-FFF2-40B4-BE49-F238E27FC236}">
-                <a16:creationId xmlns:a16="http://schemas.microsoft.com/office/drawing/2014/main" id="{09C93499-5CDF-4161-94C5-A79A00A3C57A}"/>
+                <a16:creationId xmlns:a16="http://schemas.microsoft.com/office/drawing/2014/main" id="{D03F3248-3F91-40B9-A8A2-E78527472844}"/>
               </a:ext>
             </a:extLst>
           </p:cNvPr>
@@ -7516,7 +7516,7 @@
           <p:cNvPr id="15" name="">
             <a:extLst xmlns:a="http://schemas.openxmlformats.org/drawingml/2006/main">
               <a:ext uri="{FF2B5EF4-FFF2-40B4-BE49-F238E27FC236}">
-                <a16:creationId xmlns:a16="http://schemas.microsoft.com/office/drawing/2014/main" id="{53D1131E-0111-4E67-9D4A-B038CB086FEB}"/>
+                <a16:creationId xmlns:a16="http://schemas.microsoft.com/office/drawing/2014/main" id="{0DD25554-27FE-43CB-AEA3-1FEB5535F6D4}"/>
               </a:ext>
             </a:extLst>
           </p:cNvPr>
@@ -7571,7 +7571,7 @@
     </p:spTree>
     <p:extLst>
       <p:ext uri="{BB962C8B-B14F-4D97-AF65-F5344CB8AC3E}">
-        <p14:creationId xmlns:p14="http://schemas.microsoft.com/office/powerpoint/2010/main" val="673244181"/>
+        <p14:creationId xmlns:p14="http://schemas.microsoft.com/office/powerpoint/2010/main" val="1951816429"/>
       </p:ext>
     </p:extLst>
   </p:cSld>
@@ -7772,7 +7772,7 @@
           <p:cNvPr id="23" name="">
             <a:extLst xmlns:a="http://schemas.openxmlformats.org/drawingml/2006/main">
               <a:ext uri="{FF2B5EF4-FFF2-40B4-BE49-F238E27FC236}">
-                <a16:creationId xmlns:a16="http://schemas.microsoft.com/office/drawing/2014/main" id="{BE32ED4D-D852-44B8-880F-72DCEB4094FD}"/>
+                <a16:creationId xmlns:a16="http://schemas.microsoft.com/office/drawing/2014/main" id="{791222FE-3755-4AA0-A1A3-5CFE44C9FA0D}"/>
               </a:ext>
             </a:extLst>
           </p:cNvPr>
@@ -7804,7 +7804,7 @@
           <p:cNvPr id="2" name="">
             <a:extLst xmlns:a="http://schemas.openxmlformats.org/drawingml/2006/main">
               <a:ext uri="{FF2B5EF4-FFF2-40B4-BE49-F238E27FC236}">
-                <a16:creationId xmlns:a16="http://schemas.microsoft.com/office/drawing/2014/main" id="{EDE6C320-98FF-4D55-8052-338D12BB9506}"/>
+                <a16:creationId xmlns:a16="http://schemas.microsoft.com/office/drawing/2014/main" id="{F5203E0D-BBF6-4BB4-9329-041E3E239109}"/>
               </a:ext>
             </a:extLst>
           </p:cNvPr>
@@ -7861,7 +7861,7 @@
           <p:cNvPr id="3" name="">
             <a:extLst xmlns:a="http://schemas.openxmlformats.org/drawingml/2006/main">
               <a:ext uri="{FF2B5EF4-FFF2-40B4-BE49-F238E27FC236}">
-                <a16:creationId xmlns:a16="http://schemas.microsoft.com/office/drawing/2014/main" id="{59545B94-888D-4FF9-B9C8-8B14E39F6845}"/>
+                <a16:creationId xmlns:a16="http://schemas.microsoft.com/office/drawing/2014/main" id="{EDFBEC5B-5CFA-4FD4-B971-BA8EB9C2154F}"/>
               </a:ext>
             </a:extLst>
           </p:cNvPr>
@@ -7893,7 +7893,7 @@
           <p:cNvPr id="4" name="">
             <a:extLst xmlns:a="http://schemas.openxmlformats.org/drawingml/2006/main">
               <a:ext uri="{FF2B5EF4-FFF2-40B4-BE49-F238E27FC236}">
-                <a16:creationId xmlns:a16="http://schemas.microsoft.com/office/drawing/2014/main" id="{237AE118-4DBD-4002-828D-60A686191F3B}"/>
+                <a16:creationId xmlns:a16="http://schemas.microsoft.com/office/drawing/2014/main" id="{BA3584A1-F813-403A-B034-0E597933405E}"/>
               </a:ext>
             </a:extLst>
           </p:cNvPr>
@@ -7950,7 +7950,7 @@
           <p:cNvPr id="5" name="">
             <a:extLst xmlns:a="http://schemas.openxmlformats.org/drawingml/2006/main">
               <a:ext uri="{FF2B5EF4-FFF2-40B4-BE49-F238E27FC236}">
-                <a16:creationId xmlns:a16="http://schemas.microsoft.com/office/drawing/2014/main" id="{0FEAB301-FB75-4288-95A7-B02E6E8BF1F0}"/>
+                <a16:creationId xmlns:a16="http://schemas.microsoft.com/office/drawing/2014/main" id="{61D424AE-00C1-459F-B413-04E246111CE2}"/>
               </a:ext>
             </a:extLst>
           </p:cNvPr>
@@ -8007,7 +8007,7 @@
           <p:cNvPr id="6" name="">
             <a:extLst xmlns:a="http://schemas.openxmlformats.org/drawingml/2006/main">
               <a:ext uri="{FF2B5EF4-FFF2-40B4-BE49-F238E27FC236}">
-                <a16:creationId xmlns:a16="http://schemas.microsoft.com/office/drawing/2014/main" id="{CA3C0F8A-4D3A-4AC3-8CD0-7350C5F57A2E}"/>
+                <a16:creationId xmlns:a16="http://schemas.microsoft.com/office/drawing/2014/main" id="{9B2F3842-050D-4D2A-897C-4B7784383298}"/>
               </a:ext>
             </a:extLst>
           </p:cNvPr>
@@ -8064,7 +8064,7 @@
           <p:cNvPr id="7" name="">
             <a:extLst xmlns:a="http://schemas.openxmlformats.org/drawingml/2006/main">
               <a:ext uri="{FF2B5EF4-FFF2-40B4-BE49-F238E27FC236}">
-                <a16:creationId xmlns:a16="http://schemas.microsoft.com/office/drawing/2014/main" id="{EDC0BB39-3918-4CF3-8395-71CCC8580030}"/>
+                <a16:creationId xmlns:a16="http://schemas.microsoft.com/office/drawing/2014/main" id="{969ADBD8-CDF0-4711-A5D6-FC9776168807}"/>
               </a:ext>
             </a:extLst>
           </p:cNvPr>
@@ -8096,7 +8096,7 @@
           <p:cNvPr id="8" name="">
             <a:extLst xmlns:a="http://schemas.openxmlformats.org/drawingml/2006/main">
               <a:ext uri="{FF2B5EF4-FFF2-40B4-BE49-F238E27FC236}">
-                <a16:creationId xmlns:a16="http://schemas.microsoft.com/office/drawing/2014/main" id="{65AEA5DB-2E7E-4DFB-9182-1C04BAFCEC0D}"/>
+                <a16:creationId xmlns:a16="http://schemas.microsoft.com/office/drawing/2014/main" id="{29B44CB0-B134-40FA-9739-026C43C0007F}"/>
               </a:ext>
             </a:extLst>
           </p:cNvPr>
@@ -8153,7 +8153,7 @@
           <p:cNvPr id="9" name="">
             <a:extLst xmlns:a="http://schemas.openxmlformats.org/drawingml/2006/main">
               <a:ext uri="{FF2B5EF4-FFF2-40B4-BE49-F238E27FC236}">
-                <a16:creationId xmlns:a16="http://schemas.microsoft.com/office/drawing/2014/main" id="{E0594D74-0CD0-40F7-AC7C-C7E40287FCA1}"/>
+                <a16:creationId xmlns:a16="http://schemas.microsoft.com/office/drawing/2014/main" id="{2B59F4C9-EAF8-47FD-A6DB-B098FFED42A4}"/>
               </a:ext>
             </a:extLst>
           </p:cNvPr>
@@ -8210,19 +8210,19 @@
           <p:cNvPr id="10" name="">
             <a:extLst xmlns:a="http://schemas.openxmlformats.org/drawingml/2006/main">
               <a:ext uri="{FF2B5EF4-FFF2-40B4-BE49-F238E27FC236}">
-                <a16:creationId xmlns:a16="http://schemas.microsoft.com/office/drawing/2014/main" id="{091C49C5-F689-408E-AE47-BF936E1F48BB}"/>
-              </a:ext>
-            </a:extLst>
-          </p:cNvPr>
-          <p:cNvSpPr>
-            <a:spLocks xmlns:a="http://schemas.openxmlformats.org/drawingml/2006/main" noGrp="1"/>
-          </p:cNvSpPr>
-          <p:nvPr/>
-        </p:nvSpPr>
-        <p:spPr>
-          <a:xfrm xmlns:a="http://schemas.openxmlformats.org/drawingml/2006/main">
-            <a:off x="914400" y="1257300"/>
-            <a:ext cx="10363200" cy="781050"/>
+                <a16:creationId xmlns:a16="http://schemas.microsoft.com/office/drawing/2014/main" id="{E3C83973-BEB1-448B-A56F-25EED9674DFB}"/>
+              </a:ext>
+            </a:extLst>
+          </p:cNvPr>
+          <p:cNvSpPr>
+            <a:spLocks xmlns:a="http://schemas.openxmlformats.org/drawingml/2006/main" noGrp="1"/>
+          </p:cNvSpPr>
+          <p:nvPr/>
+        </p:nvSpPr>
+        <p:spPr>
+          <a:xfrm xmlns:a="http://schemas.openxmlformats.org/drawingml/2006/main">
+            <a:off x="857250" y="1219200"/>
+            <a:ext cx="10477500" cy="742950"/>
           </a:xfrm>
           <a:prstGeom xmlns:a="http://schemas.openxmlformats.org/drawingml/2006/main" prst="rect">
             <a:avLst/>
@@ -8239,7 +8239,7 @@
           <a:lstStyle xmlns:a="http://schemas.openxmlformats.org/drawingml/2006/main"/>
           <a:p xmlns:a="http://schemas.openxmlformats.org/drawingml/2006/main">
             <a:pPr algn="ctr">
-              <a:defRPr sz="2175" b="1">
+              <a:defRPr sz="2100" b="1">
                 <a:solidFill>
                   <a:srgbClr val="17253A"/>
                 </a:solidFill>
@@ -8249,7 +8249,7 @@
               </a:defRPr>
             </a:pPr>
             <a:r>
-              <a:rPr sz="2175" b="1">
+              <a:rPr sz="2100" b="1">
                 <a:solidFill>
                   <a:srgbClr val="17253A"/>
                 </a:solidFill>
@@ -8267,28 +8267,30 @@
           <p:cNvPr id="11" name="">
             <a:extLst xmlns:a="http://schemas.openxmlformats.org/drawingml/2006/main">
               <a:ext uri="{FF2B5EF4-FFF2-40B4-BE49-F238E27FC236}">
-                <a16:creationId xmlns:a16="http://schemas.microsoft.com/office/drawing/2014/main" id="{EE3E0D78-0358-40E5-9106-CA814B4C0F5E}"/>
-              </a:ext>
-            </a:extLst>
-          </p:cNvPr>
-          <p:cNvSpPr>
-            <a:spLocks xmlns:a="http://schemas.openxmlformats.org/drawingml/2006/main" noGrp="1"/>
-          </p:cNvSpPr>
-          <p:nvPr/>
-        </p:nvSpPr>
-        <p:spPr>
-          <a:xfrm xmlns:a="http://schemas.openxmlformats.org/drawingml/2006/main">
-            <a:off x="1000125" y="2247900"/>
-            <a:ext cx="476250" cy="476250"/>
-          </a:xfrm>
-          <a:prstGeom xmlns:a="http://schemas.openxmlformats.org/drawingml/2006/main" prst="ellipse">
+                <a16:creationId xmlns:a16="http://schemas.microsoft.com/office/drawing/2014/main" id="{FCAA4E84-E78C-468A-A9CD-8B96DAE32516}"/>
+              </a:ext>
+            </a:extLst>
+          </p:cNvPr>
+          <p:cNvSpPr>
+            <a:spLocks xmlns:a="http://schemas.openxmlformats.org/drawingml/2006/main" noGrp="1"/>
+          </p:cNvSpPr>
+          <p:nvPr/>
+        </p:nvSpPr>
+        <p:spPr>
+          <a:xfrm xmlns:a="http://schemas.openxmlformats.org/drawingml/2006/main">
+            <a:off x="971550" y="2124075"/>
+            <a:ext cx="38100" cy="3524250"/>
+          </a:xfrm>
+          <a:prstGeom xmlns:a="http://schemas.openxmlformats.org/drawingml/2006/main" prst="rect">
             <a:avLst/>
           </a:prstGeom>
           <a:solidFill xmlns:a="http://schemas.openxmlformats.org/drawingml/2006/main">
-            <a:srgbClr val="18324A"/>
+            <a:srgbClr val="2C6E73"/>
           </a:solidFill>
           <a:ln xmlns:a="http://schemas.openxmlformats.org/drawingml/2006/main" w="0">
-            <a:noFill/>
+            <a:solidFill>
+              <a:srgbClr val="2C6E73"/>
+            </a:solidFill>
           </a:ln>
         </p:spPr>
       </p:sp>
@@ -8297,19 +8299,19 @@
           <p:cNvPr id="12" name="">
             <a:extLst xmlns:a="http://schemas.openxmlformats.org/drawingml/2006/main">
               <a:ext uri="{FF2B5EF4-FFF2-40B4-BE49-F238E27FC236}">
-                <a16:creationId xmlns:a16="http://schemas.microsoft.com/office/drawing/2014/main" id="{BDBD4FF8-C253-46E6-BBFC-32B80C9088C1}"/>
-              </a:ext>
-            </a:extLst>
-          </p:cNvPr>
-          <p:cNvSpPr>
-            <a:spLocks xmlns:a="http://schemas.openxmlformats.org/drawingml/2006/main" noGrp="1"/>
-          </p:cNvSpPr>
-          <p:nvPr/>
-        </p:nvSpPr>
-        <p:spPr>
-          <a:xfrm xmlns:a="http://schemas.openxmlformats.org/drawingml/2006/main">
-            <a:off x="1000125" y="2276475"/>
-            <a:ext cx="476250" cy="419100"/>
+                <a16:creationId xmlns:a16="http://schemas.microsoft.com/office/drawing/2014/main" id="{19D7BB23-C9D3-449F-9F64-1F38361AD189}"/>
+              </a:ext>
+            </a:extLst>
+          </p:cNvPr>
+          <p:cNvSpPr>
+            <a:spLocks xmlns:a="http://schemas.openxmlformats.org/drawingml/2006/main" noGrp="1"/>
+          </p:cNvSpPr>
+          <p:nvPr/>
+        </p:nvSpPr>
+        <p:spPr>
+          <a:xfrm xmlns:a="http://schemas.openxmlformats.org/drawingml/2006/main">
+            <a:off x="1162050" y="2200275"/>
+            <a:ext cx="400050" cy="400050"/>
           </a:xfrm>
           <a:prstGeom xmlns:a="http://schemas.openxmlformats.org/drawingml/2006/main" prst="rect">
             <a:avLst/>
@@ -8326,9 +8328,9 @@
           <a:lstStyle xmlns:a="http://schemas.openxmlformats.org/drawingml/2006/main"/>
           <a:p xmlns:a="http://schemas.openxmlformats.org/drawingml/2006/main">
             <a:pPr algn="ctr">
-              <a:defRPr sz="1350" b="1">
-                <a:solidFill>
-                  <a:srgbClr val="FFFFFF"/>
+              <a:defRPr sz="1125" b="1">
+                <a:solidFill>
+                  <a:srgbClr val="2C6E73"/>
                 </a:solidFill>
                 <a:latin typeface="Arial"/>
                 <a:ea typeface="Arial"/>
@@ -8336,9 +8338,9 @@
               </a:defRPr>
             </a:pPr>
             <a:r>
-              <a:rPr sz="1350" b="1">
-                <a:solidFill>
-                  <a:srgbClr val="FFFFFF"/>
+              <a:rPr sz="1125" b="1">
+                <a:solidFill>
+                  <a:srgbClr val="2C6E73"/>
                 </a:solidFill>
                 <a:latin typeface="Arial"/>
                 <a:ea typeface="Arial"/>
@@ -8354,19 +8356,19 @@
           <p:cNvPr id="13" name="">
             <a:extLst xmlns:a="http://schemas.openxmlformats.org/drawingml/2006/main">
               <a:ext uri="{FF2B5EF4-FFF2-40B4-BE49-F238E27FC236}">
-                <a16:creationId xmlns:a16="http://schemas.microsoft.com/office/drawing/2014/main" id="{4AC8D463-C890-498B-994E-6BB2A5DCEBB0}"/>
-              </a:ext>
-            </a:extLst>
-          </p:cNvPr>
-          <p:cNvSpPr>
-            <a:spLocks xmlns:a="http://schemas.openxmlformats.org/drawingml/2006/main" noGrp="1"/>
-          </p:cNvSpPr>
-          <p:nvPr/>
-        </p:nvSpPr>
-        <p:spPr>
-          <a:xfrm xmlns:a="http://schemas.openxmlformats.org/drawingml/2006/main">
-            <a:off x="1714500" y="2181225"/>
-            <a:ext cx="9429750" cy="609600"/>
+                <a16:creationId xmlns:a16="http://schemas.microsoft.com/office/drawing/2014/main" id="{3634BCC9-1EBE-4C35-997F-FA084B9C64C2}"/>
+              </a:ext>
+            </a:extLst>
+          </p:cNvPr>
+          <p:cNvSpPr>
+            <a:spLocks xmlns:a="http://schemas.openxmlformats.org/drawingml/2006/main" noGrp="1"/>
+          </p:cNvSpPr>
+          <p:nvPr/>
+        </p:nvSpPr>
+        <p:spPr>
+          <a:xfrm xmlns:a="http://schemas.openxmlformats.org/drawingml/2006/main">
+            <a:off x="1714500" y="2114550"/>
+            <a:ext cx="9525000" cy="809625"/>
           </a:xfrm>
           <a:prstGeom xmlns:a="http://schemas.openxmlformats.org/drawingml/2006/main" prst="rect">
             <a:avLst/>
@@ -8383,7 +8385,7 @@
           <a:lstStyle xmlns:a="http://schemas.openxmlformats.org/drawingml/2006/main"/>
           <a:p xmlns:a="http://schemas.openxmlformats.org/drawingml/2006/main">
             <a:pPr algn="l">
-              <a:defRPr sz="1500" b="0">
+              <a:defRPr sz="1725" b="0">
                 <a:solidFill>
                   <a:srgbClr val="17253A"/>
                 </a:solidFill>
@@ -8393,7 +8395,7 @@
               </a:defRPr>
             </a:pPr>
             <a:r>
-              <a:rPr sz="1500" b="0">
+              <a:rPr sz="1725" b="0">
                 <a:solidFill>
                   <a:srgbClr val="17253A"/>
                 </a:solidFill>
@@ -8401,7 +8403,7 @@
                 <a:ea typeface="Arial"/>
                 <a:cs typeface="Arial"/>
               </a:rPr>
-              <a:t>Identify the structure: Identify the three perpendicular dimensions in one unit.</a:t>
+              <a:t>Large box volume = 40 × 25 × 30 = 30,000 cm³</a:t>
             </a:r>
           </a:p>
         </p:txBody>
@@ -8411,28 +8413,30 @@
           <p:cNvPr id="14" name="">
             <a:extLst xmlns:a="http://schemas.openxmlformats.org/drawingml/2006/main">
               <a:ext uri="{FF2B5EF4-FFF2-40B4-BE49-F238E27FC236}">
-                <a16:creationId xmlns:a16="http://schemas.microsoft.com/office/drawing/2014/main" id="{865A490A-CB9D-4ABE-B741-A5A2A2319D2A}"/>
-              </a:ext>
-            </a:extLst>
-          </p:cNvPr>
-          <p:cNvSpPr>
-            <a:spLocks xmlns:a="http://schemas.openxmlformats.org/drawingml/2006/main" noGrp="1"/>
-          </p:cNvSpPr>
-          <p:nvPr/>
-        </p:nvSpPr>
-        <p:spPr>
-          <a:xfrm xmlns:a="http://schemas.openxmlformats.org/drawingml/2006/main">
-            <a:off x="1000125" y="2990850"/>
-            <a:ext cx="476250" cy="476250"/>
-          </a:xfrm>
-          <a:prstGeom xmlns:a="http://schemas.openxmlformats.org/drawingml/2006/main" prst="ellipse">
+                <a16:creationId xmlns:a16="http://schemas.microsoft.com/office/drawing/2014/main" id="{675B7126-7218-4A35-98FC-ABC7782EBE55}"/>
+              </a:ext>
+            </a:extLst>
+          </p:cNvPr>
+          <p:cNvSpPr>
+            <a:spLocks xmlns:a="http://schemas.openxmlformats.org/drawingml/2006/main" noGrp="1"/>
+          </p:cNvSpPr>
+          <p:nvPr/>
+        </p:nvSpPr>
+        <p:spPr>
+          <a:xfrm xmlns:a="http://schemas.openxmlformats.org/drawingml/2006/main">
+            <a:off x="1714500" y="2943225"/>
+            <a:ext cx="9334500" cy="9525"/>
+          </a:xfrm>
+          <a:prstGeom xmlns:a="http://schemas.openxmlformats.org/drawingml/2006/main" prst="rect">
             <a:avLst/>
           </a:prstGeom>
           <a:solidFill xmlns:a="http://schemas.openxmlformats.org/drawingml/2006/main">
-            <a:srgbClr val="2C6E73"/>
+            <a:srgbClr val="D9E0E6"/>
           </a:solidFill>
           <a:ln xmlns:a="http://schemas.openxmlformats.org/drawingml/2006/main" w="0">
-            <a:noFill/>
+            <a:solidFill>
+              <a:srgbClr val="D9E0E6"/>
+            </a:solidFill>
           </a:ln>
         </p:spPr>
       </p:sp>
@@ -8441,19 +8445,19 @@
           <p:cNvPr id="15" name="">
             <a:extLst xmlns:a="http://schemas.openxmlformats.org/drawingml/2006/main">
               <a:ext uri="{FF2B5EF4-FFF2-40B4-BE49-F238E27FC236}">
-                <a16:creationId xmlns:a16="http://schemas.microsoft.com/office/drawing/2014/main" id="{80A3CDD3-9720-4E89-B1A5-6FA6BD3EA56A}"/>
-              </a:ext>
-            </a:extLst>
-          </p:cNvPr>
-          <p:cNvSpPr>
-            <a:spLocks xmlns:a="http://schemas.openxmlformats.org/drawingml/2006/main" noGrp="1"/>
-          </p:cNvSpPr>
-          <p:nvPr/>
-        </p:nvSpPr>
-        <p:spPr>
-          <a:xfrm xmlns:a="http://schemas.openxmlformats.org/drawingml/2006/main">
-            <a:off x="1000125" y="3019425"/>
-            <a:ext cx="476250" cy="419100"/>
+                <a16:creationId xmlns:a16="http://schemas.microsoft.com/office/drawing/2014/main" id="{F2295CEA-85D8-45F0-882E-6540143DE6C6}"/>
+              </a:ext>
+            </a:extLst>
+          </p:cNvPr>
+          <p:cNvSpPr>
+            <a:spLocks xmlns:a="http://schemas.openxmlformats.org/drawingml/2006/main" noGrp="1"/>
+          </p:cNvSpPr>
+          <p:nvPr/>
+        </p:nvSpPr>
+        <p:spPr>
+          <a:xfrm xmlns:a="http://schemas.openxmlformats.org/drawingml/2006/main">
+            <a:off x="1162050" y="3076575"/>
+            <a:ext cx="400050" cy="400050"/>
           </a:xfrm>
           <a:prstGeom xmlns:a="http://schemas.openxmlformats.org/drawingml/2006/main" prst="rect">
             <a:avLst/>
@@ -8470,9 +8474,9 @@
           <a:lstStyle xmlns:a="http://schemas.openxmlformats.org/drawingml/2006/main"/>
           <a:p xmlns:a="http://schemas.openxmlformats.org/drawingml/2006/main">
             <a:pPr algn="ctr">
-              <a:defRPr sz="1350" b="1">
-                <a:solidFill>
-                  <a:srgbClr val="FFFFFF"/>
+              <a:defRPr sz="1125" b="1">
+                <a:solidFill>
+                  <a:srgbClr val="2C6E73"/>
                 </a:solidFill>
                 <a:latin typeface="Arial"/>
                 <a:ea typeface="Arial"/>
@@ -8480,9 +8484,9 @@
               </a:defRPr>
             </a:pPr>
             <a:r>
-              <a:rPr sz="1350" b="1">
-                <a:solidFill>
-                  <a:srgbClr val="FFFFFF"/>
+              <a:rPr sz="1125" b="1">
+                <a:solidFill>
+                  <a:srgbClr val="2C6E73"/>
                 </a:solidFill>
                 <a:latin typeface="Arial"/>
                 <a:ea typeface="Arial"/>
@@ -8498,19 +8502,19 @@
           <p:cNvPr id="16" name="">
             <a:extLst xmlns:a="http://schemas.openxmlformats.org/drawingml/2006/main">
               <a:ext uri="{FF2B5EF4-FFF2-40B4-BE49-F238E27FC236}">
-                <a16:creationId xmlns:a16="http://schemas.microsoft.com/office/drawing/2014/main" id="{AE3B7792-9009-44CF-AFFF-952F9C455375}"/>
-              </a:ext>
-            </a:extLst>
-          </p:cNvPr>
-          <p:cNvSpPr>
-            <a:spLocks xmlns:a="http://schemas.openxmlformats.org/drawingml/2006/main" noGrp="1"/>
-          </p:cNvSpPr>
-          <p:nvPr/>
-        </p:nvSpPr>
-        <p:spPr>
-          <a:xfrm xmlns:a="http://schemas.openxmlformats.org/drawingml/2006/main">
-            <a:off x="1714500" y="2924175"/>
-            <a:ext cx="9429750" cy="609600"/>
+                <a16:creationId xmlns:a16="http://schemas.microsoft.com/office/drawing/2014/main" id="{D6194580-2859-4794-9E88-880C4B0390E2}"/>
+              </a:ext>
+            </a:extLst>
+          </p:cNvPr>
+          <p:cNvSpPr>
+            <a:spLocks xmlns:a="http://schemas.openxmlformats.org/drawingml/2006/main" noGrp="1"/>
+          </p:cNvSpPr>
+          <p:nvPr/>
+        </p:nvSpPr>
+        <p:spPr>
+          <a:xfrm xmlns:a="http://schemas.openxmlformats.org/drawingml/2006/main">
+            <a:off x="1714500" y="2990850"/>
+            <a:ext cx="9525000" cy="809625"/>
           </a:xfrm>
           <a:prstGeom xmlns:a="http://schemas.openxmlformats.org/drawingml/2006/main" prst="rect">
             <a:avLst/>
@@ -8527,7 +8531,7 @@
           <a:lstStyle xmlns:a="http://schemas.openxmlformats.org/drawingml/2006/main"/>
           <a:p xmlns:a="http://schemas.openxmlformats.org/drawingml/2006/main">
             <a:pPr algn="l">
-              <a:defRPr sz="1500" b="0">
+              <a:defRPr sz="1725" b="0">
                 <a:solidFill>
                   <a:srgbClr val="17253A"/>
                 </a:solidFill>
@@ -8537,7 +8541,7 @@
               </a:defRPr>
             </a:pPr>
             <a:r>
-              <a:rPr sz="1500" b="0">
+              <a:rPr sz="1725" b="0">
                 <a:solidFill>
                   <a:srgbClr val="17253A"/>
                 </a:solidFill>
@@ -8545,7 +8549,7 @@
                 <a:ea typeface="Arial"/>
                 <a:cs typeface="Arial"/>
               </a:rPr>
-              <a:t>Set up the method: Multiply length by width by height.</a:t>
+              <a:t>One cube volume = 5 × 5 × 5 = 125 cm³</a:t>
             </a:r>
           </a:p>
         </p:txBody>
@@ -8555,28 +8559,30 @@
           <p:cNvPr id="17" name="">
             <a:extLst xmlns:a="http://schemas.openxmlformats.org/drawingml/2006/main">
               <a:ext uri="{FF2B5EF4-FFF2-40B4-BE49-F238E27FC236}">
-                <a16:creationId xmlns:a16="http://schemas.microsoft.com/office/drawing/2014/main" id="{8FBBFE64-1E10-4F06-B58C-661C2DD6DF23}"/>
-              </a:ext>
-            </a:extLst>
-          </p:cNvPr>
-          <p:cNvSpPr>
-            <a:spLocks xmlns:a="http://schemas.openxmlformats.org/drawingml/2006/main" noGrp="1"/>
-          </p:cNvSpPr>
-          <p:nvPr/>
-        </p:nvSpPr>
-        <p:spPr>
-          <a:xfrm xmlns:a="http://schemas.openxmlformats.org/drawingml/2006/main">
-            <a:off x="1000125" y="3733800"/>
-            <a:ext cx="476250" cy="476250"/>
-          </a:xfrm>
-          <a:prstGeom xmlns:a="http://schemas.openxmlformats.org/drawingml/2006/main" prst="ellipse">
+                <a16:creationId xmlns:a16="http://schemas.microsoft.com/office/drawing/2014/main" id="{35E2BB39-E6C4-4788-8E31-A7C48DD27B6C}"/>
+              </a:ext>
+            </a:extLst>
+          </p:cNvPr>
+          <p:cNvSpPr>
+            <a:spLocks xmlns:a="http://schemas.openxmlformats.org/drawingml/2006/main" noGrp="1"/>
+          </p:cNvSpPr>
+          <p:nvPr/>
+        </p:nvSpPr>
+        <p:spPr>
+          <a:xfrm xmlns:a="http://schemas.openxmlformats.org/drawingml/2006/main">
+            <a:off x="1714500" y="3819525"/>
+            <a:ext cx="9334500" cy="9525"/>
+          </a:xfrm>
+          <a:prstGeom xmlns:a="http://schemas.openxmlformats.org/drawingml/2006/main" prst="rect">
             <a:avLst/>
           </a:prstGeom>
           <a:solidFill xmlns:a="http://schemas.openxmlformats.org/drawingml/2006/main">
-            <a:srgbClr val="2C6E73"/>
+            <a:srgbClr val="D9E0E6"/>
           </a:solidFill>
           <a:ln xmlns:a="http://schemas.openxmlformats.org/drawingml/2006/main" w="0">
-            <a:noFill/>
+            <a:solidFill>
+              <a:srgbClr val="D9E0E6"/>
+            </a:solidFill>
           </a:ln>
         </p:spPr>
       </p:sp>
@@ -8585,19 +8591,19 @@
           <p:cNvPr id="18" name="">
             <a:extLst xmlns:a="http://schemas.openxmlformats.org/drawingml/2006/main">
               <a:ext uri="{FF2B5EF4-FFF2-40B4-BE49-F238E27FC236}">
-                <a16:creationId xmlns:a16="http://schemas.microsoft.com/office/drawing/2014/main" id="{7925C2A0-D549-4A48-ADD6-9D0E830291CA}"/>
-              </a:ext>
-            </a:extLst>
-          </p:cNvPr>
-          <p:cNvSpPr>
-            <a:spLocks xmlns:a="http://schemas.openxmlformats.org/drawingml/2006/main" noGrp="1"/>
-          </p:cNvSpPr>
-          <p:nvPr/>
-        </p:nvSpPr>
-        <p:spPr>
-          <a:xfrm xmlns:a="http://schemas.openxmlformats.org/drawingml/2006/main">
-            <a:off x="1000125" y="3762375"/>
-            <a:ext cx="476250" cy="419100"/>
+                <a16:creationId xmlns:a16="http://schemas.microsoft.com/office/drawing/2014/main" id="{A4DE8017-B4AB-4A99-BB66-10E078E04FE7}"/>
+              </a:ext>
+            </a:extLst>
+          </p:cNvPr>
+          <p:cNvSpPr>
+            <a:spLocks xmlns:a="http://schemas.openxmlformats.org/drawingml/2006/main" noGrp="1"/>
+          </p:cNvSpPr>
+          <p:nvPr/>
+        </p:nvSpPr>
+        <p:spPr>
+          <a:xfrm xmlns:a="http://schemas.openxmlformats.org/drawingml/2006/main">
+            <a:off x="1162050" y="3952875"/>
+            <a:ext cx="400050" cy="400050"/>
           </a:xfrm>
           <a:prstGeom xmlns:a="http://schemas.openxmlformats.org/drawingml/2006/main" prst="rect">
             <a:avLst/>
@@ -8614,9 +8620,9 @@
           <a:lstStyle xmlns:a="http://schemas.openxmlformats.org/drawingml/2006/main"/>
           <a:p xmlns:a="http://schemas.openxmlformats.org/drawingml/2006/main">
             <a:pPr algn="ctr">
-              <a:defRPr sz="1350" b="1">
-                <a:solidFill>
-                  <a:srgbClr val="FFFFFF"/>
+              <a:defRPr sz="1125" b="1">
+                <a:solidFill>
+                  <a:srgbClr val="2C6E73"/>
                 </a:solidFill>
                 <a:latin typeface="Arial"/>
                 <a:ea typeface="Arial"/>
@@ -8624,9 +8630,9 @@
               </a:defRPr>
             </a:pPr>
             <a:r>
-              <a:rPr sz="1350" b="1">
-                <a:solidFill>
-                  <a:srgbClr val="FFFFFF"/>
+              <a:rPr sz="1125" b="1">
+                <a:solidFill>
+                  <a:srgbClr val="2C6E73"/>
                 </a:solidFill>
                 <a:latin typeface="Arial"/>
                 <a:ea typeface="Arial"/>
@@ -8642,19 +8648,19 @@
           <p:cNvPr id="19" name="">
             <a:extLst xmlns:a="http://schemas.openxmlformats.org/drawingml/2006/main">
               <a:ext uri="{FF2B5EF4-FFF2-40B4-BE49-F238E27FC236}">
-                <a16:creationId xmlns:a16="http://schemas.microsoft.com/office/drawing/2014/main" id="{AE515058-ACDE-43B5-9570-B9B81E788F5F}"/>
-              </a:ext>
-            </a:extLst>
-          </p:cNvPr>
-          <p:cNvSpPr>
-            <a:spLocks xmlns:a="http://schemas.openxmlformats.org/drawingml/2006/main" noGrp="1"/>
-          </p:cNvSpPr>
-          <p:nvPr/>
-        </p:nvSpPr>
-        <p:spPr>
-          <a:xfrm xmlns:a="http://schemas.openxmlformats.org/drawingml/2006/main">
-            <a:off x="1714500" y="3667125"/>
-            <a:ext cx="9429750" cy="609600"/>
+                <a16:creationId xmlns:a16="http://schemas.microsoft.com/office/drawing/2014/main" id="{67D79BC3-E7DB-4327-94E9-AF46D4BDDDFE}"/>
+              </a:ext>
+            </a:extLst>
+          </p:cNvPr>
+          <p:cNvSpPr>
+            <a:spLocks xmlns:a="http://schemas.openxmlformats.org/drawingml/2006/main" noGrp="1"/>
+          </p:cNvSpPr>
+          <p:nvPr/>
+        </p:nvSpPr>
+        <p:spPr>
+          <a:xfrm xmlns:a="http://schemas.openxmlformats.org/drawingml/2006/main">
+            <a:off x="1714500" y="3867150"/>
+            <a:ext cx="9525000" cy="809625"/>
           </a:xfrm>
           <a:prstGeom xmlns:a="http://schemas.openxmlformats.org/drawingml/2006/main" prst="rect">
             <a:avLst/>
@@ -8671,7 +8677,7 @@
           <a:lstStyle xmlns:a="http://schemas.openxmlformats.org/drawingml/2006/main"/>
           <a:p xmlns:a="http://schemas.openxmlformats.org/drawingml/2006/main">
             <a:pPr algn="l">
-              <a:defRPr sz="1500" b="0">
+              <a:defRPr sz="1725" b="0">
                 <a:solidFill>
                   <a:srgbClr val="17253A"/>
                 </a:solidFill>
@@ -8681,7 +8687,7 @@
               </a:defRPr>
             </a:pPr>
             <a:r>
-              <a:rPr sz="1500" b="0">
+              <a:rPr sz="1725" b="0">
                 <a:solidFill>
                   <a:srgbClr val="17253A"/>
                 </a:solidFill>
@@ -8689,7 +8695,7 @@
                 <a:ea typeface="Arial"/>
                 <a:cs typeface="Arial"/>
               </a:rPr>
-              <a:t>Complete the calculation: 240 cubes.</a:t>
+              <a:t>30,000 ÷ 125</a:t>
             </a:r>
           </a:p>
         </p:txBody>
@@ -8699,28 +8705,30 @@
           <p:cNvPr id="20" name="">
             <a:extLst xmlns:a="http://schemas.openxmlformats.org/drawingml/2006/main">
               <a:ext uri="{FF2B5EF4-FFF2-40B4-BE49-F238E27FC236}">
-                <a16:creationId xmlns:a16="http://schemas.microsoft.com/office/drawing/2014/main" id="{8582C775-41C4-47D4-B6B3-80B4445BE086}"/>
-              </a:ext>
-            </a:extLst>
-          </p:cNvPr>
-          <p:cNvSpPr>
-            <a:spLocks xmlns:a="http://schemas.openxmlformats.org/drawingml/2006/main" noGrp="1"/>
-          </p:cNvSpPr>
-          <p:nvPr/>
-        </p:nvSpPr>
-        <p:spPr>
-          <a:xfrm xmlns:a="http://schemas.openxmlformats.org/drawingml/2006/main">
-            <a:off x="1000125" y="4476750"/>
-            <a:ext cx="476250" cy="476250"/>
-          </a:xfrm>
-          <a:prstGeom xmlns:a="http://schemas.openxmlformats.org/drawingml/2006/main" prst="ellipse">
+                <a16:creationId xmlns:a16="http://schemas.microsoft.com/office/drawing/2014/main" id="{391564D3-435C-4C61-AF10-2C13AEA7C343}"/>
+              </a:ext>
+            </a:extLst>
+          </p:cNvPr>
+          <p:cNvSpPr>
+            <a:spLocks xmlns:a="http://schemas.openxmlformats.org/drawingml/2006/main" noGrp="1"/>
+          </p:cNvSpPr>
+          <p:nvPr/>
+        </p:nvSpPr>
+        <p:spPr>
+          <a:xfrm xmlns:a="http://schemas.openxmlformats.org/drawingml/2006/main">
+            <a:off x="1714500" y="4695825"/>
+            <a:ext cx="9334500" cy="9525"/>
+          </a:xfrm>
+          <a:prstGeom xmlns:a="http://schemas.openxmlformats.org/drawingml/2006/main" prst="rect">
             <a:avLst/>
           </a:prstGeom>
           <a:solidFill xmlns:a="http://schemas.openxmlformats.org/drawingml/2006/main">
-            <a:srgbClr val="2C6E73"/>
+            <a:srgbClr val="D9E0E6"/>
           </a:solidFill>
           <a:ln xmlns:a="http://schemas.openxmlformats.org/drawingml/2006/main" w="0">
-            <a:noFill/>
+            <a:solidFill>
+              <a:srgbClr val="D9E0E6"/>
+            </a:solidFill>
           </a:ln>
         </p:spPr>
       </p:sp>
@@ -8729,19 +8737,19 @@
           <p:cNvPr id="21" name="">
             <a:extLst xmlns:a="http://schemas.openxmlformats.org/drawingml/2006/main">
               <a:ext uri="{FF2B5EF4-FFF2-40B4-BE49-F238E27FC236}">
-                <a16:creationId xmlns:a16="http://schemas.microsoft.com/office/drawing/2014/main" id="{D6DF2E74-A144-4603-AEAF-5D1DC763A5F1}"/>
-              </a:ext>
-            </a:extLst>
-          </p:cNvPr>
-          <p:cNvSpPr>
-            <a:spLocks xmlns:a="http://schemas.openxmlformats.org/drawingml/2006/main" noGrp="1"/>
-          </p:cNvSpPr>
-          <p:nvPr/>
-        </p:nvSpPr>
-        <p:spPr>
-          <a:xfrm xmlns:a="http://schemas.openxmlformats.org/drawingml/2006/main">
-            <a:off x="1000125" y="4505325"/>
-            <a:ext cx="476250" cy="419100"/>
+                <a16:creationId xmlns:a16="http://schemas.microsoft.com/office/drawing/2014/main" id="{44B774B6-8580-479C-9492-29625B38A3D1}"/>
+              </a:ext>
+            </a:extLst>
+          </p:cNvPr>
+          <p:cNvSpPr>
+            <a:spLocks xmlns:a="http://schemas.openxmlformats.org/drawingml/2006/main" noGrp="1"/>
+          </p:cNvSpPr>
+          <p:nvPr/>
+        </p:nvSpPr>
+        <p:spPr>
+          <a:xfrm xmlns:a="http://schemas.openxmlformats.org/drawingml/2006/main">
+            <a:off x="1162050" y="4829175"/>
+            <a:ext cx="400050" cy="400050"/>
           </a:xfrm>
           <a:prstGeom xmlns:a="http://schemas.openxmlformats.org/drawingml/2006/main" prst="rect">
             <a:avLst/>
@@ -8758,9 +8766,9 @@
           <a:lstStyle xmlns:a="http://schemas.openxmlformats.org/drawingml/2006/main"/>
           <a:p xmlns:a="http://schemas.openxmlformats.org/drawingml/2006/main">
             <a:pPr algn="ctr">
-              <a:defRPr sz="1350" b="1">
-                <a:solidFill>
-                  <a:srgbClr val="FFFFFF"/>
+              <a:defRPr sz="1125" b="1">
+                <a:solidFill>
+                  <a:srgbClr val="2F785D"/>
                 </a:solidFill>
                 <a:latin typeface="Arial"/>
                 <a:ea typeface="Arial"/>
@@ -8768,9 +8776,9 @@
               </a:defRPr>
             </a:pPr>
             <a:r>
-              <a:rPr sz="1350" b="1">
-                <a:solidFill>
-                  <a:srgbClr val="FFFFFF"/>
+              <a:rPr sz="1125" b="1">
+                <a:solidFill>
+                  <a:srgbClr val="2F785D"/>
                 </a:solidFill>
                 <a:latin typeface="Arial"/>
                 <a:ea typeface="Arial"/>
@@ -8786,19 +8794,19 @@
           <p:cNvPr id="22" name="">
             <a:extLst xmlns:a="http://schemas.openxmlformats.org/drawingml/2006/main">
               <a:ext uri="{FF2B5EF4-FFF2-40B4-BE49-F238E27FC236}">
-                <a16:creationId xmlns:a16="http://schemas.microsoft.com/office/drawing/2014/main" id="{45D7B3A3-D046-4F43-9BC9-68AB26B1BDC4}"/>
-              </a:ext>
-            </a:extLst>
-          </p:cNvPr>
-          <p:cNvSpPr>
-            <a:spLocks xmlns:a="http://schemas.openxmlformats.org/drawingml/2006/main" noGrp="1"/>
-          </p:cNvSpPr>
-          <p:nvPr/>
-        </p:nvSpPr>
-        <p:spPr>
-          <a:xfrm xmlns:a="http://schemas.openxmlformats.org/drawingml/2006/main">
-            <a:off x="1714500" y="4410075"/>
-            <a:ext cx="9429750" cy="609600"/>
+                <a16:creationId xmlns:a16="http://schemas.microsoft.com/office/drawing/2014/main" id="{5163196F-98D6-411C-B262-ECF15FC78DF0}"/>
+              </a:ext>
+            </a:extLst>
+          </p:cNvPr>
+          <p:cNvSpPr>
+            <a:spLocks xmlns:a="http://schemas.openxmlformats.org/drawingml/2006/main" noGrp="1"/>
+          </p:cNvSpPr>
+          <p:nvPr/>
+        </p:nvSpPr>
+        <p:spPr>
+          <a:xfrm xmlns:a="http://schemas.openxmlformats.org/drawingml/2006/main">
+            <a:off x="1714500" y="4743450"/>
+            <a:ext cx="9525000" cy="809625"/>
           </a:xfrm>
           <a:prstGeom xmlns:a="http://schemas.openxmlformats.org/drawingml/2006/main" prst="rect">
             <a:avLst/>
@@ -8815,7 +8823,7 @@
           <a:lstStyle xmlns:a="http://schemas.openxmlformats.org/drawingml/2006/main"/>
           <a:p xmlns:a="http://schemas.openxmlformats.org/drawingml/2006/main">
             <a:pPr algn="l">
-              <a:defRPr sz="1500" b="1">
+              <a:defRPr sz="1725" b="1">
                 <a:solidFill>
                   <a:srgbClr val="2F785D"/>
                 </a:solidFill>
@@ -8825,7 +8833,7 @@
               </a:defRPr>
             </a:pPr>
             <a:r>
-              <a:rPr sz="1500" b="1">
+              <a:rPr sz="1725" b="1">
                 <a:solidFill>
                   <a:srgbClr val="2F785D"/>
                 </a:solidFill>
@@ -8833,7 +8841,7 @@
                 <a:ea typeface="Arial"/>
                 <a:cs typeface="Arial"/>
               </a:rPr>
-              <a:t>Check the result: Use cubic units and compare the result with an estimate.</a:t>
+              <a:t>240 cubes</a:t>
             </a:r>
           </a:p>
         </p:txBody>
@@ -8841,7 +8849,7 @@
     </p:spTree>
     <p:extLst>
       <p:ext uri="{BB962C8B-B14F-4D97-AF65-F5344CB8AC3E}">
-        <p14:creationId xmlns:p14="http://schemas.microsoft.com/office/powerpoint/2010/main" val="822138540"/>
+        <p14:creationId xmlns:p14="http://schemas.microsoft.com/office/powerpoint/2010/main" val="273523792"/>
       </p:ext>
     </p:extLst>
   </p:cSld>
@@ -9134,7 +9142,7 @@
           <p:cNvPr id="15" name="">
             <a:extLst xmlns:a="http://schemas.openxmlformats.org/drawingml/2006/main">
               <a:ext uri="{FF2B5EF4-FFF2-40B4-BE49-F238E27FC236}">
-                <a16:creationId xmlns:a16="http://schemas.microsoft.com/office/drawing/2014/main" id="{D9A54CAC-32A7-4DCD-956E-6835FCFCBF1F}"/>
+                <a16:creationId xmlns:a16="http://schemas.microsoft.com/office/drawing/2014/main" id="{9CA78B4D-751A-4273-B629-A1A6F871281C}"/>
               </a:ext>
             </a:extLst>
           </p:cNvPr>
@@ -9166,7 +9174,7 @@
           <p:cNvPr id="2" name="">
             <a:extLst xmlns:a="http://schemas.openxmlformats.org/drawingml/2006/main">
               <a:ext uri="{FF2B5EF4-FFF2-40B4-BE49-F238E27FC236}">
-                <a16:creationId xmlns:a16="http://schemas.microsoft.com/office/drawing/2014/main" id="{B3AC5C09-E4DA-42E0-A13F-0D52A9C5EE08}"/>
+                <a16:creationId xmlns:a16="http://schemas.microsoft.com/office/drawing/2014/main" id="{3BCD2B70-886A-448C-BE64-DA1353D8323F}"/>
               </a:ext>
             </a:extLst>
           </p:cNvPr>
@@ -9223,7 +9231,7 @@
           <p:cNvPr id="3" name="">
             <a:extLst xmlns:a="http://schemas.openxmlformats.org/drawingml/2006/main">
               <a:ext uri="{FF2B5EF4-FFF2-40B4-BE49-F238E27FC236}">
-                <a16:creationId xmlns:a16="http://schemas.microsoft.com/office/drawing/2014/main" id="{7C468239-9BDC-4534-9A18-593A55DD31E2}"/>
+                <a16:creationId xmlns:a16="http://schemas.microsoft.com/office/drawing/2014/main" id="{29875829-B3B1-45AE-B71A-98CC911B79E3}"/>
               </a:ext>
             </a:extLst>
           </p:cNvPr>
@@ -9255,7 +9263,7 @@
           <p:cNvPr id="4" name="">
             <a:extLst xmlns:a="http://schemas.openxmlformats.org/drawingml/2006/main">
               <a:ext uri="{FF2B5EF4-FFF2-40B4-BE49-F238E27FC236}">
-                <a16:creationId xmlns:a16="http://schemas.microsoft.com/office/drawing/2014/main" id="{2A93FC21-6223-4108-BE41-1A8AD664339B}"/>
+                <a16:creationId xmlns:a16="http://schemas.microsoft.com/office/drawing/2014/main" id="{967B83EA-7CC8-4919-82B9-E1BDAFFF2EB0}"/>
               </a:ext>
             </a:extLst>
           </p:cNvPr>
@@ -9312,7 +9320,7 @@
           <p:cNvPr id="5" name="">
             <a:extLst xmlns:a="http://schemas.openxmlformats.org/drawingml/2006/main">
               <a:ext uri="{FF2B5EF4-FFF2-40B4-BE49-F238E27FC236}">
-                <a16:creationId xmlns:a16="http://schemas.microsoft.com/office/drawing/2014/main" id="{FCEA1212-488F-42F9-8BE9-7BE0830B9569}"/>
+                <a16:creationId xmlns:a16="http://schemas.microsoft.com/office/drawing/2014/main" id="{180AB0D2-17E4-40DF-9CE8-71231935342D}"/>
               </a:ext>
             </a:extLst>
           </p:cNvPr>
@@ -9369,7 +9377,7 @@
           <p:cNvPr id="6" name="">
             <a:extLst xmlns:a="http://schemas.openxmlformats.org/drawingml/2006/main">
               <a:ext uri="{FF2B5EF4-FFF2-40B4-BE49-F238E27FC236}">
-                <a16:creationId xmlns:a16="http://schemas.microsoft.com/office/drawing/2014/main" id="{CE114050-F04A-4429-88B9-8537EFE5360A}"/>
+                <a16:creationId xmlns:a16="http://schemas.microsoft.com/office/drawing/2014/main" id="{637A19B1-108A-4468-A662-74F85E573BDC}"/>
               </a:ext>
             </a:extLst>
           </p:cNvPr>
@@ -9426,7 +9434,7 @@
           <p:cNvPr id="7" name="">
             <a:extLst xmlns:a="http://schemas.openxmlformats.org/drawingml/2006/main">
               <a:ext uri="{FF2B5EF4-FFF2-40B4-BE49-F238E27FC236}">
-                <a16:creationId xmlns:a16="http://schemas.microsoft.com/office/drawing/2014/main" id="{0D11D435-D114-465C-82DC-5CDE1E45CDFA}"/>
+                <a16:creationId xmlns:a16="http://schemas.microsoft.com/office/drawing/2014/main" id="{67A919A8-7DA3-477B-A577-7A9DD6DC602C}"/>
               </a:ext>
             </a:extLst>
           </p:cNvPr>
@@ -9458,7 +9466,7 @@
           <p:cNvPr id="8" name="">
             <a:extLst xmlns:a="http://schemas.openxmlformats.org/drawingml/2006/main">
               <a:ext uri="{FF2B5EF4-FFF2-40B4-BE49-F238E27FC236}">
-                <a16:creationId xmlns:a16="http://schemas.microsoft.com/office/drawing/2014/main" id="{A6C6628C-8751-4146-A2C7-015089C21AED}"/>
+                <a16:creationId xmlns:a16="http://schemas.microsoft.com/office/drawing/2014/main" id="{80B85BBC-FDEA-4EF8-8772-DE08E4B3BDF0}"/>
               </a:ext>
             </a:extLst>
           </p:cNvPr>
@@ -9515,7 +9523,7 @@
           <p:cNvPr id="9" name="">
             <a:extLst xmlns:a="http://schemas.openxmlformats.org/drawingml/2006/main">
               <a:ext uri="{FF2B5EF4-FFF2-40B4-BE49-F238E27FC236}">
-                <a16:creationId xmlns:a16="http://schemas.microsoft.com/office/drawing/2014/main" id="{D9E6A852-93DE-4706-9D3F-B4F6E1D45377}"/>
+                <a16:creationId xmlns:a16="http://schemas.microsoft.com/office/drawing/2014/main" id="{548A95D3-F612-4B0C-AAA3-68F2846ADB8F}"/>
               </a:ext>
             </a:extLst>
           </p:cNvPr>
@@ -9572,7 +9580,7 @@
           <p:cNvPr id="10" name="">
             <a:extLst xmlns:a="http://schemas.openxmlformats.org/drawingml/2006/main">
               <a:ext uri="{FF2B5EF4-FFF2-40B4-BE49-F238E27FC236}">
-                <a16:creationId xmlns:a16="http://schemas.microsoft.com/office/drawing/2014/main" id="{871A6F81-7CB1-4BD5-9F60-9D09B7CA672E}"/>
+                <a16:creationId xmlns:a16="http://schemas.microsoft.com/office/drawing/2014/main" id="{D6A2CA06-8EBB-4495-9AAB-E5DC7C3375E0}"/>
               </a:ext>
             </a:extLst>
           </p:cNvPr>
@@ -9629,7 +9637,7 @@
           <p:cNvPr id="11" name="">
             <a:extLst xmlns:a="http://schemas.openxmlformats.org/drawingml/2006/main">
               <a:ext uri="{FF2B5EF4-FFF2-40B4-BE49-F238E27FC236}">
-                <a16:creationId xmlns:a16="http://schemas.microsoft.com/office/drawing/2014/main" id="{F89E2531-74A6-4539-A2B8-D46B9C9E39ED}"/>
+                <a16:creationId xmlns:a16="http://schemas.microsoft.com/office/drawing/2014/main" id="{A57B34EB-DA4D-4446-A472-B46AA7728CA6}"/>
               </a:ext>
             </a:extLst>
           </p:cNvPr>
@@ -9686,7 +9694,7 @@
           <p:cNvPr id="12" name="">
             <a:extLst xmlns:a="http://schemas.openxmlformats.org/drawingml/2006/main">
               <a:ext uri="{FF2B5EF4-FFF2-40B4-BE49-F238E27FC236}">
-                <a16:creationId xmlns:a16="http://schemas.microsoft.com/office/drawing/2014/main" id="{104592F8-3562-42EE-BCE0-430900B8A069}"/>
+                <a16:creationId xmlns:a16="http://schemas.microsoft.com/office/drawing/2014/main" id="{8D75EB5A-D58B-4330-9F34-E4E65CE46F7D}"/>
               </a:ext>
             </a:extLst>
           </p:cNvPr>
@@ -9718,7 +9726,7 @@
           <p:cNvPr id="13" name="">
             <a:extLst xmlns:a="http://schemas.openxmlformats.org/drawingml/2006/main">
               <a:ext uri="{FF2B5EF4-FFF2-40B4-BE49-F238E27FC236}">
-                <a16:creationId xmlns:a16="http://schemas.microsoft.com/office/drawing/2014/main" id="{92B4691B-17CF-4BE6-9F27-0E76C42DADCE}"/>
+                <a16:creationId xmlns:a16="http://schemas.microsoft.com/office/drawing/2014/main" id="{FDFC8D3F-312B-4EF6-8BC4-A81FF740C78B}"/>
               </a:ext>
             </a:extLst>
           </p:cNvPr>
@@ -9775,7 +9783,7 @@
           <p:cNvPr id="14" name="">
             <a:extLst xmlns:a="http://schemas.openxmlformats.org/drawingml/2006/main">
               <a:ext uri="{FF2B5EF4-FFF2-40B4-BE49-F238E27FC236}">
-                <a16:creationId xmlns:a16="http://schemas.microsoft.com/office/drawing/2014/main" id="{197D6545-9B81-4213-8761-800B6E3B0D65}"/>
+                <a16:creationId xmlns:a16="http://schemas.microsoft.com/office/drawing/2014/main" id="{7A7443A3-4157-4118-8A40-485122940E40}"/>
               </a:ext>
             </a:extLst>
           </p:cNvPr>
@@ -9830,7 +9838,7 @@
     </p:spTree>
     <p:extLst>
       <p:ext uri="{BB962C8B-B14F-4D97-AF65-F5344CB8AC3E}">
-        <p14:creationId xmlns:p14="http://schemas.microsoft.com/office/powerpoint/2010/main" val="1288959915"/>
+        <p14:creationId xmlns:p14="http://schemas.microsoft.com/office/powerpoint/2010/main" val="1633842186"/>
       </p:ext>
     </p:extLst>
   </p:cSld>
@@ -10031,7 +10039,7 @@
           <p:cNvPr id="16" name="">
             <a:extLst xmlns:a="http://schemas.openxmlformats.org/drawingml/2006/main">
               <a:ext uri="{FF2B5EF4-FFF2-40B4-BE49-F238E27FC236}">
-                <a16:creationId xmlns:a16="http://schemas.microsoft.com/office/drawing/2014/main" id="{F35E964F-C358-40B9-AE11-83113C447A8A}"/>
+                <a16:creationId xmlns:a16="http://schemas.microsoft.com/office/drawing/2014/main" id="{FD692459-CB81-4E6D-BD99-3F529BF1DE68}"/>
               </a:ext>
             </a:extLst>
           </p:cNvPr>
@@ -10063,7 +10071,7 @@
           <p:cNvPr id="2" name="">
             <a:extLst xmlns:a="http://schemas.openxmlformats.org/drawingml/2006/main">
               <a:ext uri="{FF2B5EF4-FFF2-40B4-BE49-F238E27FC236}">
-                <a16:creationId xmlns:a16="http://schemas.microsoft.com/office/drawing/2014/main" id="{2CBF21E5-0D9A-445C-85E8-3DA78CDDE01D}"/>
+                <a16:creationId xmlns:a16="http://schemas.microsoft.com/office/drawing/2014/main" id="{FBB272EB-C680-462D-93EB-EE60259D20CD}"/>
               </a:ext>
             </a:extLst>
           </p:cNvPr>
@@ -10120,7 +10128,7 @@
           <p:cNvPr id="3" name="">
             <a:extLst xmlns:a="http://schemas.openxmlformats.org/drawingml/2006/main">
               <a:ext uri="{FF2B5EF4-FFF2-40B4-BE49-F238E27FC236}">
-                <a16:creationId xmlns:a16="http://schemas.microsoft.com/office/drawing/2014/main" id="{2F6F0A91-9BE2-43D1-A46C-F6CC2E8EFF06}"/>
+                <a16:creationId xmlns:a16="http://schemas.microsoft.com/office/drawing/2014/main" id="{C2815E5C-8EAC-45AA-B530-B94315EE4DD2}"/>
               </a:ext>
             </a:extLst>
           </p:cNvPr>
@@ -10152,7 +10160,7 @@
           <p:cNvPr id="4" name="">
             <a:extLst xmlns:a="http://schemas.openxmlformats.org/drawingml/2006/main">
               <a:ext uri="{FF2B5EF4-FFF2-40B4-BE49-F238E27FC236}">
-                <a16:creationId xmlns:a16="http://schemas.microsoft.com/office/drawing/2014/main" id="{4BC219B4-0B85-4686-BC30-7EC4E7C2895F}"/>
+                <a16:creationId xmlns:a16="http://schemas.microsoft.com/office/drawing/2014/main" id="{406A69ED-E122-4554-979D-35D820DF8F5E}"/>
               </a:ext>
             </a:extLst>
           </p:cNvPr>
@@ -10209,7 +10217,7 @@
           <p:cNvPr id="5" name="">
             <a:extLst xmlns:a="http://schemas.openxmlformats.org/drawingml/2006/main">
               <a:ext uri="{FF2B5EF4-FFF2-40B4-BE49-F238E27FC236}">
-                <a16:creationId xmlns:a16="http://schemas.microsoft.com/office/drawing/2014/main" id="{FA4805FC-F4B1-4B65-A68C-4A49EF7DC471}"/>
+                <a16:creationId xmlns:a16="http://schemas.microsoft.com/office/drawing/2014/main" id="{383579E9-0356-464A-A9A7-3D5C3F7C51F8}"/>
               </a:ext>
             </a:extLst>
           </p:cNvPr>
@@ -10266,7 +10274,7 @@
           <p:cNvPr id="6" name="">
             <a:extLst xmlns:a="http://schemas.openxmlformats.org/drawingml/2006/main">
               <a:ext uri="{FF2B5EF4-FFF2-40B4-BE49-F238E27FC236}">
-                <a16:creationId xmlns:a16="http://schemas.microsoft.com/office/drawing/2014/main" id="{3B092E26-4A94-44B8-9BDB-A2104E245E39}"/>
+                <a16:creationId xmlns:a16="http://schemas.microsoft.com/office/drawing/2014/main" id="{F408FA17-3283-4E19-9EF2-8052844AA606}"/>
               </a:ext>
             </a:extLst>
           </p:cNvPr>
@@ -10323,7 +10331,7 @@
           <p:cNvPr id="7" name="">
             <a:extLst xmlns:a="http://schemas.openxmlformats.org/drawingml/2006/main">
               <a:ext uri="{FF2B5EF4-FFF2-40B4-BE49-F238E27FC236}">
-                <a16:creationId xmlns:a16="http://schemas.microsoft.com/office/drawing/2014/main" id="{F1458DEC-E5CA-41D5-9990-E34CF85FC9FB}"/>
+                <a16:creationId xmlns:a16="http://schemas.microsoft.com/office/drawing/2014/main" id="{6245E28F-EE08-4CC3-B6E1-DA7A7858D8BD}"/>
               </a:ext>
             </a:extLst>
           </p:cNvPr>
@@ -10355,7 +10363,7 @@
           <p:cNvPr id="8" name="">
             <a:extLst xmlns:a="http://schemas.openxmlformats.org/drawingml/2006/main">
               <a:ext uri="{FF2B5EF4-FFF2-40B4-BE49-F238E27FC236}">
-                <a16:creationId xmlns:a16="http://schemas.microsoft.com/office/drawing/2014/main" id="{ADD9CB4F-22C5-470C-AA59-BF52FD6430D5}"/>
+                <a16:creationId xmlns:a16="http://schemas.microsoft.com/office/drawing/2014/main" id="{007A2409-A17F-48CD-BAC7-E90DCFE65F8B}"/>
               </a:ext>
             </a:extLst>
           </p:cNvPr>
@@ -10412,7 +10420,7 @@
           <p:cNvPr id="9" name="">
             <a:extLst xmlns:a="http://schemas.openxmlformats.org/drawingml/2006/main">
               <a:ext uri="{FF2B5EF4-FFF2-40B4-BE49-F238E27FC236}">
-                <a16:creationId xmlns:a16="http://schemas.microsoft.com/office/drawing/2014/main" id="{B30C1639-65F8-4E03-97C3-86BAA2131770}"/>
+                <a16:creationId xmlns:a16="http://schemas.microsoft.com/office/drawing/2014/main" id="{06C750DF-4BC9-4671-8C85-AF0BA2A4AE53}"/>
               </a:ext>
             </a:extLst>
           </p:cNvPr>
@@ -10469,7 +10477,7 @@
           <p:cNvPr id="10" name="">
             <a:extLst xmlns:a="http://schemas.openxmlformats.org/drawingml/2006/main">
               <a:ext uri="{FF2B5EF4-FFF2-40B4-BE49-F238E27FC236}">
-                <a16:creationId xmlns:a16="http://schemas.microsoft.com/office/drawing/2014/main" id="{2ABABF3C-C03B-460F-A225-7AFE9163B888}"/>
+                <a16:creationId xmlns:a16="http://schemas.microsoft.com/office/drawing/2014/main" id="{3BB31C3D-769B-47DD-987A-26C1B8505B79}"/>
               </a:ext>
             </a:extLst>
           </p:cNvPr>
@@ -10526,7 +10534,7 @@
           <p:cNvPr id="11" name="">
             <a:extLst xmlns:a="http://schemas.openxmlformats.org/drawingml/2006/main">
               <a:ext uri="{FF2B5EF4-FFF2-40B4-BE49-F238E27FC236}">
-                <a16:creationId xmlns:a16="http://schemas.microsoft.com/office/drawing/2014/main" id="{C316E14D-C4F7-4FA6-92A4-2FB560D7B714}"/>
+                <a16:creationId xmlns:a16="http://schemas.microsoft.com/office/drawing/2014/main" id="{BBF3F1E1-71C2-4E13-896A-20095EB02E27}"/>
               </a:ext>
             </a:extLst>
           </p:cNvPr>
@@ -10583,7 +10591,7 @@
           <p:cNvPr id="12" name="">
             <a:extLst xmlns:a="http://schemas.openxmlformats.org/drawingml/2006/main">
               <a:ext uri="{FF2B5EF4-FFF2-40B4-BE49-F238E27FC236}">
-                <a16:creationId xmlns:a16="http://schemas.microsoft.com/office/drawing/2014/main" id="{626664CA-C570-4530-989D-92CACC2A796C}"/>
+                <a16:creationId xmlns:a16="http://schemas.microsoft.com/office/drawing/2014/main" id="{165CBC62-2B14-4632-902E-D1F02E250D33}"/>
               </a:ext>
             </a:extLst>
           </p:cNvPr>
@@ -10640,7 +10648,7 @@
           <p:cNvPr id="13" name="">
             <a:extLst xmlns:a="http://schemas.openxmlformats.org/drawingml/2006/main">
               <a:ext uri="{FF2B5EF4-FFF2-40B4-BE49-F238E27FC236}">
-                <a16:creationId xmlns:a16="http://schemas.microsoft.com/office/drawing/2014/main" id="{54EC9CB0-406D-4A3B-9B91-20E5A2642B28}"/>
+                <a16:creationId xmlns:a16="http://schemas.microsoft.com/office/drawing/2014/main" id="{BF34156A-6EF2-415B-9658-A0B02A3F5AD7}"/>
               </a:ext>
             </a:extLst>
           </p:cNvPr>
@@ -10697,7 +10705,7 @@
           <p:cNvPr id="14" name="">
             <a:extLst xmlns:a="http://schemas.openxmlformats.org/drawingml/2006/main">
               <a:ext uri="{FF2B5EF4-FFF2-40B4-BE49-F238E27FC236}">
-                <a16:creationId xmlns:a16="http://schemas.microsoft.com/office/drawing/2014/main" id="{8741EB8E-E968-4C32-A96C-8F965E8AA3F2}"/>
+                <a16:creationId xmlns:a16="http://schemas.microsoft.com/office/drawing/2014/main" id="{CEF16303-E832-4C08-935F-DABB386DCDE6}"/>
               </a:ext>
             </a:extLst>
           </p:cNvPr>
@@ -10754,7 +10762,7 @@
           <p:cNvPr id="15" name="">
             <a:extLst xmlns:a="http://schemas.openxmlformats.org/drawingml/2006/main">
               <a:ext uri="{FF2B5EF4-FFF2-40B4-BE49-F238E27FC236}">
-                <a16:creationId xmlns:a16="http://schemas.microsoft.com/office/drawing/2014/main" id="{3BC0996D-5FEF-42B5-8F4F-D8A6515ED007}"/>
+                <a16:creationId xmlns:a16="http://schemas.microsoft.com/office/drawing/2014/main" id="{EABE3688-5257-4130-9014-FDC9B73D6EE5}"/>
               </a:ext>
             </a:extLst>
           </p:cNvPr>
@@ -10809,7 +10817,7 @@
     </p:spTree>
     <p:extLst>
       <p:ext uri="{BB962C8B-B14F-4D97-AF65-F5344CB8AC3E}">
-        <p14:creationId xmlns:p14="http://schemas.microsoft.com/office/powerpoint/2010/main" val="188353517"/>
+        <p14:creationId xmlns:p14="http://schemas.microsoft.com/office/powerpoint/2010/main" val="1473512269"/>
       </p:ext>
     </p:extLst>
   </p:cSld>
@@ -10964,7 +10972,7 @@
           <p:cNvPr id="16" name="">
             <a:extLst xmlns:a="http://schemas.openxmlformats.org/drawingml/2006/main">
               <a:ext uri="{FF2B5EF4-FFF2-40B4-BE49-F238E27FC236}">
-                <a16:creationId xmlns:a16="http://schemas.microsoft.com/office/drawing/2014/main" id="{4BD32925-12FA-4F8C-BC38-DEFF732F7FA5}"/>
+                <a16:creationId xmlns:a16="http://schemas.microsoft.com/office/drawing/2014/main" id="{B9AE32C4-1032-4689-8D69-E1EBF81C95B9}"/>
               </a:ext>
             </a:extLst>
           </p:cNvPr>
@@ -10996,7 +11004,7 @@
           <p:cNvPr id="2" name="">
             <a:extLst xmlns:a="http://schemas.openxmlformats.org/drawingml/2006/main">
               <a:ext uri="{FF2B5EF4-FFF2-40B4-BE49-F238E27FC236}">
-                <a16:creationId xmlns:a16="http://schemas.microsoft.com/office/drawing/2014/main" id="{853FC738-CDC4-467E-B90D-058FFD6992D2}"/>
+                <a16:creationId xmlns:a16="http://schemas.microsoft.com/office/drawing/2014/main" id="{CDE85928-45B9-4C31-AF7E-A5340D7BF5EC}"/>
               </a:ext>
             </a:extLst>
           </p:cNvPr>
@@ -11053,7 +11061,7 @@
           <p:cNvPr id="3" name="">
             <a:extLst xmlns:a="http://schemas.openxmlformats.org/drawingml/2006/main">
               <a:ext uri="{FF2B5EF4-FFF2-40B4-BE49-F238E27FC236}">
-                <a16:creationId xmlns:a16="http://schemas.microsoft.com/office/drawing/2014/main" id="{DD1F6031-B3DD-412C-8FE4-BBD558E093FD}"/>
+                <a16:creationId xmlns:a16="http://schemas.microsoft.com/office/drawing/2014/main" id="{9C250A40-4226-408F-91D1-4A14F7C3EE3F}"/>
               </a:ext>
             </a:extLst>
           </p:cNvPr>
@@ -11085,7 +11093,7 @@
           <p:cNvPr id="4" name="">
             <a:extLst xmlns:a="http://schemas.openxmlformats.org/drawingml/2006/main">
               <a:ext uri="{FF2B5EF4-FFF2-40B4-BE49-F238E27FC236}">
-                <a16:creationId xmlns:a16="http://schemas.microsoft.com/office/drawing/2014/main" id="{821DC9C2-123A-4691-96E0-EC49EEB0F54F}"/>
+                <a16:creationId xmlns:a16="http://schemas.microsoft.com/office/drawing/2014/main" id="{9D91ECB2-A2CA-472C-B5A8-C56441211694}"/>
               </a:ext>
             </a:extLst>
           </p:cNvPr>
@@ -11142,7 +11150,7 @@
           <p:cNvPr id="5" name="">
             <a:extLst xmlns:a="http://schemas.openxmlformats.org/drawingml/2006/main">
               <a:ext uri="{FF2B5EF4-FFF2-40B4-BE49-F238E27FC236}">
-                <a16:creationId xmlns:a16="http://schemas.microsoft.com/office/drawing/2014/main" id="{42702B58-6AAF-4386-AABE-1F030667F635}"/>
+                <a16:creationId xmlns:a16="http://schemas.microsoft.com/office/drawing/2014/main" id="{DBA2E122-3F8F-4E45-8C19-962D516293A0}"/>
               </a:ext>
             </a:extLst>
           </p:cNvPr>
@@ -11199,7 +11207,7 @@
           <p:cNvPr id="6" name="">
             <a:extLst xmlns:a="http://schemas.openxmlformats.org/drawingml/2006/main">
               <a:ext uri="{FF2B5EF4-FFF2-40B4-BE49-F238E27FC236}">
-                <a16:creationId xmlns:a16="http://schemas.microsoft.com/office/drawing/2014/main" id="{65A29912-8B31-41F1-8123-B5B043C4CD4C}"/>
+                <a16:creationId xmlns:a16="http://schemas.microsoft.com/office/drawing/2014/main" id="{757CE9D9-D28B-4C40-9EEE-8653DB2420E1}"/>
               </a:ext>
             </a:extLst>
           </p:cNvPr>
@@ -11256,7 +11264,7 @@
           <p:cNvPr id="7" name="">
             <a:extLst xmlns:a="http://schemas.openxmlformats.org/drawingml/2006/main">
               <a:ext uri="{FF2B5EF4-FFF2-40B4-BE49-F238E27FC236}">
-                <a16:creationId xmlns:a16="http://schemas.microsoft.com/office/drawing/2014/main" id="{8F3D8A7A-9F94-46FB-96F8-B6A82F1D95AE}"/>
+                <a16:creationId xmlns:a16="http://schemas.microsoft.com/office/drawing/2014/main" id="{489B94D4-7DB8-43D7-B48D-EFA40FE22011}"/>
               </a:ext>
             </a:extLst>
           </p:cNvPr>
@@ -11288,7 +11296,7 @@
           <p:cNvPr id="8" name="">
             <a:extLst xmlns:a="http://schemas.openxmlformats.org/drawingml/2006/main">
               <a:ext uri="{FF2B5EF4-FFF2-40B4-BE49-F238E27FC236}">
-                <a16:creationId xmlns:a16="http://schemas.microsoft.com/office/drawing/2014/main" id="{FD501767-998F-44D3-AC86-3EE6238A0E9A}"/>
+                <a16:creationId xmlns:a16="http://schemas.microsoft.com/office/drawing/2014/main" id="{ED05E9DC-22FD-4DBA-8AEE-6C06E318AA6D}"/>
               </a:ext>
             </a:extLst>
           </p:cNvPr>
@@ -11345,7 +11353,7 @@
           <p:cNvPr id="9" name="">
             <a:extLst xmlns:a="http://schemas.openxmlformats.org/drawingml/2006/main">
               <a:ext uri="{FF2B5EF4-FFF2-40B4-BE49-F238E27FC236}">
-                <a16:creationId xmlns:a16="http://schemas.microsoft.com/office/drawing/2014/main" id="{271FDB10-56AC-44B9-A763-7C9A1B208CBA}"/>
+                <a16:creationId xmlns:a16="http://schemas.microsoft.com/office/drawing/2014/main" id="{37422182-29C8-4698-8442-8E51314B7BD9}"/>
               </a:ext>
             </a:extLst>
           </p:cNvPr>
@@ -11406,7 +11414,7 @@
           <p:nvPr/>
         </p:nvPicPr>
         <p:blipFill>
-          <a:blip xmlns:r="http://schemas.openxmlformats.org/officeDocument/2006/relationships" xmlns:a="http://schemas.openxmlformats.org/drawingml/2006/main" r:embed="Rfaa7bb25144c45dc"/>
+          <a:blip xmlns:r="http://schemas.openxmlformats.org/officeDocument/2006/relationships" xmlns:a="http://schemas.openxmlformats.org/drawingml/2006/main" r:embed="Raa7c1f806bc04561"/>
           <a:stretch xmlns:a="http://schemas.openxmlformats.org/drawingml/2006/main"/>
         </p:blipFill>
         <p:spPr>
@@ -11424,7 +11432,7 @@
           <p:cNvPr id="11" name="">
             <a:extLst xmlns:a="http://schemas.openxmlformats.org/drawingml/2006/main">
               <a:ext uri="{FF2B5EF4-FFF2-40B4-BE49-F238E27FC236}">
-                <a16:creationId xmlns:a16="http://schemas.microsoft.com/office/drawing/2014/main" id="{66202736-A5A6-4C79-B290-4A48F0B59F5D}"/>
+                <a16:creationId xmlns:a16="http://schemas.microsoft.com/office/drawing/2014/main" id="{799E9E63-FB4A-4774-BF3C-4EB87EDCE4F3}"/>
               </a:ext>
             </a:extLst>
           </p:cNvPr>
@@ -11481,7 +11489,7 @@
           <p:cNvPr id="12" name="">
             <a:extLst xmlns:a="http://schemas.openxmlformats.org/drawingml/2006/main">
               <a:ext uri="{FF2B5EF4-FFF2-40B4-BE49-F238E27FC236}">
-                <a16:creationId xmlns:a16="http://schemas.microsoft.com/office/drawing/2014/main" id="{E3F41566-7E60-4522-9A4C-E40CA9CFF4F8}"/>
+                <a16:creationId xmlns:a16="http://schemas.microsoft.com/office/drawing/2014/main" id="{CECBBE99-D7BF-42B5-BB7D-C722F5A0AE67}"/>
               </a:ext>
             </a:extLst>
           </p:cNvPr>
@@ -11538,7 +11546,7 @@
           <p:cNvPr id="13" name="">
             <a:extLst xmlns:a="http://schemas.openxmlformats.org/drawingml/2006/main">
               <a:ext uri="{FF2B5EF4-FFF2-40B4-BE49-F238E27FC236}">
-                <a16:creationId xmlns:a16="http://schemas.microsoft.com/office/drawing/2014/main" id="{B50E0E85-4771-4B4E-99E7-4DA7B94E5D73}"/>
+                <a16:creationId xmlns:a16="http://schemas.microsoft.com/office/drawing/2014/main" id="{4884E99D-8352-4B49-A075-C8E18B217E08}"/>
               </a:ext>
             </a:extLst>
           </p:cNvPr>
@@ -11570,7 +11578,7 @@
           <p:cNvPr id="14" name="">
             <a:extLst xmlns:a="http://schemas.openxmlformats.org/drawingml/2006/main">
               <a:ext uri="{FF2B5EF4-FFF2-40B4-BE49-F238E27FC236}">
-                <a16:creationId xmlns:a16="http://schemas.microsoft.com/office/drawing/2014/main" id="{7E3A4D64-2303-49D5-B327-8B1B3972074C}"/>
+                <a16:creationId xmlns:a16="http://schemas.microsoft.com/office/drawing/2014/main" id="{B3A4FA08-C29F-4652-B05D-2B1E15266F44}"/>
               </a:ext>
             </a:extLst>
           </p:cNvPr>
@@ -11627,7 +11635,7 @@
           <p:cNvPr id="15" name="">
             <a:extLst xmlns:a="http://schemas.openxmlformats.org/drawingml/2006/main">
               <a:ext uri="{FF2B5EF4-FFF2-40B4-BE49-F238E27FC236}">
-                <a16:creationId xmlns:a16="http://schemas.microsoft.com/office/drawing/2014/main" id="{B0C30120-76E7-4CFE-B6B4-3BA3DE136858}"/>
+                <a16:creationId xmlns:a16="http://schemas.microsoft.com/office/drawing/2014/main" id="{2BA893AA-50A3-440F-BB54-533620E4AC0D}"/>
               </a:ext>
             </a:extLst>
           </p:cNvPr>
@@ -11682,7 +11690,7 @@
     </p:spTree>
     <p:extLst>
       <p:ext uri="{BB962C8B-B14F-4D97-AF65-F5344CB8AC3E}">
-        <p14:creationId xmlns:p14="http://schemas.microsoft.com/office/powerpoint/2010/main" val="1825107797"/>
+        <p14:creationId xmlns:p14="http://schemas.microsoft.com/office/powerpoint/2010/main" val="754015540"/>
       </p:ext>
     </p:extLst>
   </p:cSld>
@@ -11837,7 +11845,7 @@
           <p:cNvPr id="23" name="">
             <a:extLst xmlns:a="http://schemas.openxmlformats.org/drawingml/2006/main">
               <a:ext uri="{FF2B5EF4-FFF2-40B4-BE49-F238E27FC236}">
-                <a16:creationId xmlns:a16="http://schemas.microsoft.com/office/drawing/2014/main" id="{CF039F73-2EAB-45A6-809F-4D4842643952}"/>
+                <a16:creationId xmlns:a16="http://schemas.microsoft.com/office/drawing/2014/main" id="{CC33A12F-56AA-4275-A0C5-8E1922CF3589}"/>
               </a:ext>
             </a:extLst>
           </p:cNvPr>
@@ -11869,7 +11877,7 @@
           <p:cNvPr id="2" name="">
             <a:extLst xmlns:a="http://schemas.openxmlformats.org/drawingml/2006/main">
               <a:ext uri="{FF2B5EF4-FFF2-40B4-BE49-F238E27FC236}">
-                <a16:creationId xmlns:a16="http://schemas.microsoft.com/office/drawing/2014/main" id="{6A95CA86-5A5E-4ADA-BC96-EA5304DA71E5}"/>
+                <a16:creationId xmlns:a16="http://schemas.microsoft.com/office/drawing/2014/main" id="{AE25B610-BB83-4C19-8365-099178345C38}"/>
               </a:ext>
             </a:extLst>
           </p:cNvPr>
@@ -11926,7 +11934,7 @@
           <p:cNvPr id="3" name="">
             <a:extLst xmlns:a="http://schemas.openxmlformats.org/drawingml/2006/main">
               <a:ext uri="{FF2B5EF4-FFF2-40B4-BE49-F238E27FC236}">
-                <a16:creationId xmlns:a16="http://schemas.microsoft.com/office/drawing/2014/main" id="{3B09A280-CCB2-4713-9B1C-AE7536F09F48}"/>
+                <a16:creationId xmlns:a16="http://schemas.microsoft.com/office/drawing/2014/main" id="{CFDBEFCD-FACC-4490-83F6-C94F287528F8}"/>
               </a:ext>
             </a:extLst>
           </p:cNvPr>
@@ -11958,7 +11966,7 @@
           <p:cNvPr id="4" name="">
             <a:extLst xmlns:a="http://schemas.openxmlformats.org/drawingml/2006/main">
               <a:ext uri="{FF2B5EF4-FFF2-40B4-BE49-F238E27FC236}">
-                <a16:creationId xmlns:a16="http://schemas.microsoft.com/office/drawing/2014/main" id="{781D0AE0-7681-4E41-BF12-7EBFF687AC3E}"/>
+                <a16:creationId xmlns:a16="http://schemas.microsoft.com/office/drawing/2014/main" id="{2100C021-798A-4AB8-BD1F-11F2E16D0685}"/>
               </a:ext>
             </a:extLst>
           </p:cNvPr>
@@ -12015,7 +12023,7 @@
           <p:cNvPr id="5" name="">
             <a:extLst xmlns:a="http://schemas.openxmlformats.org/drawingml/2006/main">
               <a:ext uri="{FF2B5EF4-FFF2-40B4-BE49-F238E27FC236}">
-                <a16:creationId xmlns:a16="http://schemas.microsoft.com/office/drawing/2014/main" id="{6779404D-7EBB-49BB-9D65-D772383E1B48}"/>
+                <a16:creationId xmlns:a16="http://schemas.microsoft.com/office/drawing/2014/main" id="{1106BB2C-93EE-4D83-980A-A154179BC916}"/>
               </a:ext>
             </a:extLst>
           </p:cNvPr>
@@ -12072,7 +12080,7 @@
           <p:cNvPr id="6" name="">
             <a:extLst xmlns:a="http://schemas.openxmlformats.org/drawingml/2006/main">
               <a:ext uri="{FF2B5EF4-FFF2-40B4-BE49-F238E27FC236}">
-                <a16:creationId xmlns:a16="http://schemas.microsoft.com/office/drawing/2014/main" id="{172019A0-66B3-410F-9DFC-79F33E205B72}"/>
+                <a16:creationId xmlns:a16="http://schemas.microsoft.com/office/drawing/2014/main" id="{C5670C99-451C-432F-AC8A-0E74877EE5E2}"/>
               </a:ext>
             </a:extLst>
           </p:cNvPr>
@@ -12129,7 +12137,7 @@
           <p:cNvPr id="7" name="">
             <a:extLst xmlns:a="http://schemas.openxmlformats.org/drawingml/2006/main">
               <a:ext uri="{FF2B5EF4-FFF2-40B4-BE49-F238E27FC236}">
-                <a16:creationId xmlns:a16="http://schemas.microsoft.com/office/drawing/2014/main" id="{F00F6DD1-315D-4D35-9947-7B28ADFD3E03}"/>
+                <a16:creationId xmlns:a16="http://schemas.microsoft.com/office/drawing/2014/main" id="{4096B82E-0CDF-4491-B864-9A1D60DB49F2}"/>
               </a:ext>
             </a:extLst>
           </p:cNvPr>
@@ -12161,7 +12169,7 @@
           <p:cNvPr id="8" name="">
             <a:extLst xmlns:a="http://schemas.openxmlformats.org/drawingml/2006/main">
               <a:ext uri="{FF2B5EF4-FFF2-40B4-BE49-F238E27FC236}">
-                <a16:creationId xmlns:a16="http://schemas.microsoft.com/office/drawing/2014/main" id="{22039D21-DE02-477A-8C3B-53480E2333EE}"/>
+                <a16:creationId xmlns:a16="http://schemas.microsoft.com/office/drawing/2014/main" id="{972342C3-84B5-4D26-9311-E11CF2F7B3FE}"/>
               </a:ext>
             </a:extLst>
           </p:cNvPr>
@@ -12218,7 +12226,7 @@
           <p:cNvPr id="9" name="">
             <a:extLst xmlns:a="http://schemas.openxmlformats.org/drawingml/2006/main">
               <a:ext uri="{FF2B5EF4-FFF2-40B4-BE49-F238E27FC236}">
-                <a16:creationId xmlns:a16="http://schemas.microsoft.com/office/drawing/2014/main" id="{C3EB2AB6-F16B-40A0-91A9-26772C9D0A33}"/>
+                <a16:creationId xmlns:a16="http://schemas.microsoft.com/office/drawing/2014/main" id="{E7E31A90-A945-4935-BE4C-6098B3F22E2F}"/>
               </a:ext>
             </a:extLst>
           </p:cNvPr>
@@ -12275,7 +12283,7 @@
           <p:cNvPr id="10" name="">
             <a:extLst xmlns:a="http://schemas.openxmlformats.org/drawingml/2006/main">
               <a:ext uri="{FF2B5EF4-FFF2-40B4-BE49-F238E27FC236}">
-                <a16:creationId xmlns:a16="http://schemas.microsoft.com/office/drawing/2014/main" id="{7998D0F4-D440-46C4-A393-5CB57576A5CD}"/>
+                <a16:creationId xmlns:a16="http://schemas.microsoft.com/office/drawing/2014/main" id="{4B5C9AB9-94D2-4088-960E-9C23EA573FF2}"/>
               </a:ext>
             </a:extLst>
           </p:cNvPr>
@@ -12309,7 +12317,7 @@
           <p:cNvPr id="11" name="">
             <a:extLst xmlns:a="http://schemas.openxmlformats.org/drawingml/2006/main">
               <a:ext uri="{FF2B5EF4-FFF2-40B4-BE49-F238E27FC236}">
-                <a16:creationId xmlns:a16="http://schemas.microsoft.com/office/drawing/2014/main" id="{C50AD37F-D235-435B-B839-F601CDF88F30}"/>
+                <a16:creationId xmlns:a16="http://schemas.microsoft.com/office/drawing/2014/main" id="{07AE16D3-B332-42E4-AE37-A5D3B388F6D3}"/>
               </a:ext>
             </a:extLst>
           </p:cNvPr>
@@ -12341,7 +12349,7 @@
           <p:cNvPr id="12" name="">
             <a:extLst xmlns:a="http://schemas.openxmlformats.org/drawingml/2006/main">
               <a:ext uri="{FF2B5EF4-FFF2-40B4-BE49-F238E27FC236}">
-                <a16:creationId xmlns:a16="http://schemas.microsoft.com/office/drawing/2014/main" id="{797A4FF6-7D41-4651-BEC0-79BD8BB4937B}"/>
+                <a16:creationId xmlns:a16="http://schemas.microsoft.com/office/drawing/2014/main" id="{B9789C16-B9A5-4C98-B275-B36614F7580A}"/>
               </a:ext>
             </a:extLst>
           </p:cNvPr>
@@ -12398,7 +12406,7 @@
           <p:cNvPr id="13" name="">
             <a:extLst xmlns:a="http://schemas.openxmlformats.org/drawingml/2006/main">
               <a:ext uri="{FF2B5EF4-FFF2-40B4-BE49-F238E27FC236}">
-                <a16:creationId xmlns:a16="http://schemas.microsoft.com/office/drawing/2014/main" id="{9D5F9734-573B-4776-8F2B-DCD1869D769F}"/>
+                <a16:creationId xmlns:a16="http://schemas.microsoft.com/office/drawing/2014/main" id="{F178FDFB-C7B9-46A3-9F45-3AADF17475BF}"/>
               </a:ext>
             </a:extLst>
           </p:cNvPr>
@@ -12455,7 +12463,7 @@
           <p:cNvPr id="14" name="">
             <a:extLst xmlns:a="http://schemas.openxmlformats.org/drawingml/2006/main">
               <a:ext uri="{FF2B5EF4-FFF2-40B4-BE49-F238E27FC236}">
-                <a16:creationId xmlns:a16="http://schemas.microsoft.com/office/drawing/2014/main" id="{F461072E-DE9D-45C7-BE13-2C63B7CA87F2}"/>
+                <a16:creationId xmlns:a16="http://schemas.microsoft.com/office/drawing/2014/main" id="{6FD54488-016B-46F5-A6D6-8DC7591CB1C6}"/>
               </a:ext>
             </a:extLst>
           </p:cNvPr>
@@ -12489,7 +12497,7 @@
           <p:cNvPr id="15" name="">
             <a:extLst xmlns:a="http://schemas.openxmlformats.org/drawingml/2006/main">
               <a:ext uri="{FF2B5EF4-FFF2-40B4-BE49-F238E27FC236}">
-                <a16:creationId xmlns:a16="http://schemas.microsoft.com/office/drawing/2014/main" id="{8E21CFBE-898E-4CBB-9F88-22DAF01C87A5}"/>
+                <a16:creationId xmlns:a16="http://schemas.microsoft.com/office/drawing/2014/main" id="{51DBB8E8-89A5-43AD-ACD4-682E1F25B8B7}"/>
               </a:ext>
             </a:extLst>
           </p:cNvPr>
@@ -12521,7 +12529,7 @@
           <p:cNvPr id="16" name="">
             <a:extLst xmlns:a="http://schemas.openxmlformats.org/drawingml/2006/main">
               <a:ext uri="{FF2B5EF4-FFF2-40B4-BE49-F238E27FC236}">
-                <a16:creationId xmlns:a16="http://schemas.microsoft.com/office/drawing/2014/main" id="{F44DFD80-A389-43AD-8C30-9A92358325D3}"/>
+                <a16:creationId xmlns:a16="http://schemas.microsoft.com/office/drawing/2014/main" id="{E4E1DDD5-A6E2-4270-AC2D-6AAC80E3F5F3}"/>
               </a:ext>
             </a:extLst>
           </p:cNvPr>
@@ -12578,7 +12586,7 @@
           <p:cNvPr id="17" name="">
             <a:extLst xmlns:a="http://schemas.openxmlformats.org/drawingml/2006/main">
               <a:ext uri="{FF2B5EF4-FFF2-40B4-BE49-F238E27FC236}">
-                <a16:creationId xmlns:a16="http://schemas.microsoft.com/office/drawing/2014/main" id="{C31491E9-EAAA-4AED-B198-F643190EA771}"/>
+                <a16:creationId xmlns:a16="http://schemas.microsoft.com/office/drawing/2014/main" id="{47CD8AFD-B1F5-4EBD-A285-9491AEFD970D}"/>
               </a:ext>
             </a:extLst>
           </p:cNvPr>
@@ -12635,7 +12643,7 @@
           <p:cNvPr id="18" name="">
             <a:extLst xmlns:a="http://schemas.openxmlformats.org/drawingml/2006/main">
               <a:ext uri="{FF2B5EF4-FFF2-40B4-BE49-F238E27FC236}">
-                <a16:creationId xmlns:a16="http://schemas.microsoft.com/office/drawing/2014/main" id="{BA1B346D-A895-4FDF-8A11-4777C2614C8F}"/>
+                <a16:creationId xmlns:a16="http://schemas.microsoft.com/office/drawing/2014/main" id="{7EB22D98-12BF-4B2B-8568-2CD3C428CDF4}"/>
               </a:ext>
             </a:extLst>
           </p:cNvPr>
@@ -12669,7 +12677,7 @@
           <p:cNvPr id="19" name="">
             <a:extLst xmlns:a="http://schemas.openxmlformats.org/drawingml/2006/main">
               <a:ext uri="{FF2B5EF4-FFF2-40B4-BE49-F238E27FC236}">
-                <a16:creationId xmlns:a16="http://schemas.microsoft.com/office/drawing/2014/main" id="{8DDD7F64-F72E-4E9D-B49A-4CFD66A8518A}"/>
+                <a16:creationId xmlns:a16="http://schemas.microsoft.com/office/drawing/2014/main" id="{042474D2-06F0-48A8-93ED-7B6CD0C6D7D9}"/>
               </a:ext>
             </a:extLst>
           </p:cNvPr>
@@ -12701,7 +12709,7 @@
           <p:cNvPr id="20" name="">
             <a:extLst xmlns:a="http://schemas.openxmlformats.org/drawingml/2006/main">
               <a:ext uri="{FF2B5EF4-FFF2-40B4-BE49-F238E27FC236}">
-                <a16:creationId xmlns:a16="http://schemas.microsoft.com/office/drawing/2014/main" id="{A7F5B534-1BE5-4813-9629-10AC0F46A4F0}"/>
+                <a16:creationId xmlns:a16="http://schemas.microsoft.com/office/drawing/2014/main" id="{8420CA0E-1337-4E42-BD08-602EA311435D}"/>
               </a:ext>
             </a:extLst>
           </p:cNvPr>
@@ -12758,7 +12766,7 @@
           <p:cNvPr id="21" name="">
             <a:extLst xmlns:a="http://schemas.openxmlformats.org/drawingml/2006/main">
               <a:ext uri="{FF2B5EF4-FFF2-40B4-BE49-F238E27FC236}">
-                <a16:creationId xmlns:a16="http://schemas.microsoft.com/office/drawing/2014/main" id="{43DC8251-B9AC-46A5-BA93-932ED0D173A4}"/>
+                <a16:creationId xmlns:a16="http://schemas.microsoft.com/office/drawing/2014/main" id="{87384B29-54C7-405E-AAA1-A56A33DD959D}"/>
               </a:ext>
             </a:extLst>
           </p:cNvPr>
@@ -12815,7 +12823,7 @@
           <p:cNvPr id="22" name="">
             <a:extLst xmlns:a="http://schemas.openxmlformats.org/drawingml/2006/main">
               <a:ext uri="{FF2B5EF4-FFF2-40B4-BE49-F238E27FC236}">
-                <a16:creationId xmlns:a16="http://schemas.microsoft.com/office/drawing/2014/main" id="{7F7067E6-77F1-4B8E-9936-0856831724E7}"/>
+                <a16:creationId xmlns:a16="http://schemas.microsoft.com/office/drawing/2014/main" id="{3D69346A-320E-4C80-A900-19042B04AF0B}"/>
               </a:ext>
             </a:extLst>
           </p:cNvPr>
@@ -12870,7 +12878,7 @@
     </p:spTree>
     <p:extLst>
       <p:ext uri="{BB962C8B-B14F-4D97-AF65-F5344CB8AC3E}">
-        <p14:creationId xmlns:p14="http://schemas.microsoft.com/office/powerpoint/2010/main" val="2091726901"/>
+        <p14:creationId xmlns:p14="http://schemas.microsoft.com/office/powerpoint/2010/main" val="336939742"/>
       </p:ext>
     </p:extLst>
   </p:cSld>
@@ -13071,7 +13079,7 @@
           <p:cNvPr id="22" name="">
             <a:extLst xmlns:a="http://schemas.openxmlformats.org/drawingml/2006/main">
               <a:ext uri="{FF2B5EF4-FFF2-40B4-BE49-F238E27FC236}">
-                <a16:creationId xmlns:a16="http://schemas.microsoft.com/office/drawing/2014/main" id="{738C667B-296C-4FC6-B9DC-BAC45C4888F8}"/>
+                <a16:creationId xmlns:a16="http://schemas.microsoft.com/office/drawing/2014/main" id="{222EC625-6163-4B6E-99E7-4D565D7CA1FD}"/>
               </a:ext>
             </a:extLst>
           </p:cNvPr>
@@ -13103,7 +13111,7 @@
           <p:cNvPr id="2" name="">
             <a:extLst xmlns:a="http://schemas.openxmlformats.org/drawingml/2006/main">
               <a:ext uri="{FF2B5EF4-FFF2-40B4-BE49-F238E27FC236}">
-                <a16:creationId xmlns:a16="http://schemas.microsoft.com/office/drawing/2014/main" id="{22DDF7A0-8F21-4BCB-91E0-86E14CBF4131}"/>
+                <a16:creationId xmlns:a16="http://schemas.microsoft.com/office/drawing/2014/main" id="{609FAD06-850D-4DDA-8177-DF1297D59DBA}"/>
               </a:ext>
             </a:extLst>
           </p:cNvPr>
@@ -13160,7 +13168,7 @@
           <p:cNvPr id="3" name="">
             <a:extLst xmlns:a="http://schemas.openxmlformats.org/drawingml/2006/main">
               <a:ext uri="{FF2B5EF4-FFF2-40B4-BE49-F238E27FC236}">
-                <a16:creationId xmlns:a16="http://schemas.microsoft.com/office/drawing/2014/main" id="{711E2E42-093B-4399-B444-04724448DE07}"/>
+                <a16:creationId xmlns:a16="http://schemas.microsoft.com/office/drawing/2014/main" id="{69D4EB47-A253-4C93-8619-4224A25E2043}"/>
               </a:ext>
             </a:extLst>
           </p:cNvPr>
@@ -13192,7 +13200,7 @@
           <p:cNvPr id="4" name="">
             <a:extLst xmlns:a="http://schemas.openxmlformats.org/drawingml/2006/main">
               <a:ext uri="{FF2B5EF4-FFF2-40B4-BE49-F238E27FC236}">
-                <a16:creationId xmlns:a16="http://schemas.microsoft.com/office/drawing/2014/main" id="{1E05A45A-B685-406C-ABB8-4800F53286AC}"/>
+                <a16:creationId xmlns:a16="http://schemas.microsoft.com/office/drawing/2014/main" id="{DF95674E-52AB-412D-BB35-0AB99CBA8420}"/>
               </a:ext>
             </a:extLst>
           </p:cNvPr>
@@ -13249,7 +13257,7 @@
           <p:cNvPr id="5" name="">
             <a:extLst xmlns:a="http://schemas.openxmlformats.org/drawingml/2006/main">
               <a:ext uri="{FF2B5EF4-FFF2-40B4-BE49-F238E27FC236}">
-                <a16:creationId xmlns:a16="http://schemas.microsoft.com/office/drawing/2014/main" id="{2423A47F-F7C8-42D0-9A8C-F1BF754DB9A9}"/>
+                <a16:creationId xmlns:a16="http://schemas.microsoft.com/office/drawing/2014/main" id="{2780ECA2-3029-47C3-87B1-4AE3ED6A672C}"/>
               </a:ext>
             </a:extLst>
           </p:cNvPr>
@@ -13306,7 +13314,7 @@
           <p:cNvPr id="6" name="">
             <a:extLst xmlns:a="http://schemas.openxmlformats.org/drawingml/2006/main">
               <a:ext uri="{FF2B5EF4-FFF2-40B4-BE49-F238E27FC236}">
-                <a16:creationId xmlns:a16="http://schemas.microsoft.com/office/drawing/2014/main" id="{E0C5B3DE-4C2B-4E45-BD5A-594FF45F665A}"/>
+                <a16:creationId xmlns:a16="http://schemas.microsoft.com/office/drawing/2014/main" id="{A5B80CC0-3ECF-4198-AFF6-15E34E66769E}"/>
               </a:ext>
             </a:extLst>
           </p:cNvPr>
@@ -13363,7 +13371,7 @@
           <p:cNvPr id="7" name="">
             <a:extLst xmlns:a="http://schemas.openxmlformats.org/drawingml/2006/main">
               <a:ext uri="{FF2B5EF4-FFF2-40B4-BE49-F238E27FC236}">
-                <a16:creationId xmlns:a16="http://schemas.microsoft.com/office/drawing/2014/main" id="{D94181C4-3222-463D-81BB-07911BB69062}"/>
+                <a16:creationId xmlns:a16="http://schemas.microsoft.com/office/drawing/2014/main" id="{6B6579A9-1AA6-46EB-B218-FB5EF3035635}"/>
               </a:ext>
             </a:extLst>
           </p:cNvPr>
@@ -13395,7 +13403,7 @@
           <p:cNvPr id="8" name="">
             <a:extLst xmlns:a="http://schemas.openxmlformats.org/drawingml/2006/main">
               <a:ext uri="{FF2B5EF4-FFF2-40B4-BE49-F238E27FC236}">
-                <a16:creationId xmlns:a16="http://schemas.microsoft.com/office/drawing/2014/main" id="{56C6BF18-7F86-4B81-AD77-2E71433E7615}"/>
+                <a16:creationId xmlns:a16="http://schemas.microsoft.com/office/drawing/2014/main" id="{43A1F88E-12DE-44F9-872E-BB794C8C7D25}"/>
               </a:ext>
             </a:extLst>
           </p:cNvPr>
@@ -13452,7 +13460,7 @@
           <p:cNvPr id="9" name="">
             <a:extLst xmlns:a="http://schemas.openxmlformats.org/drawingml/2006/main">
               <a:ext uri="{FF2B5EF4-FFF2-40B4-BE49-F238E27FC236}">
-                <a16:creationId xmlns:a16="http://schemas.microsoft.com/office/drawing/2014/main" id="{6B82F0D1-2425-4115-AB7D-D230F5426B01}"/>
+                <a16:creationId xmlns:a16="http://schemas.microsoft.com/office/drawing/2014/main" id="{8D3CE4BE-E716-45E2-9173-E1900CFDCACB}"/>
               </a:ext>
             </a:extLst>
           </p:cNvPr>
@@ -13509,7 +13517,7 @@
           <p:cNvPr id="10" name="">
             <a:extLst xmlns:a="http://schemas.openxmlformats.org/drawingml/2006/main">
               <a:ext uri="{FF2B5EF4-FFF2-40B4-BE49-F238E27FC236}">
-                <a16:creationId xmlns:a16="http://schemas.microsoft.com/office/drawing/2014/main" id="{54F91300-6B54-4C70-ACD9-D9F9F87C0D3A}"/>
+                <a16:creationId xmlns:a16="http://schemas.microsoft.com/office/drawing/2014/main" id="{BA37E565-CF2A-44A0-9A2F-BBA1AF299E2C}"/>
               </a:ext>
             </a:extLst>
           </p:cNvPr>
@@ -13543,7 +13551,7 @@
           <p:cNvPr id="11" name="">
             <a:extLst xmlns:a="http://schemas.openxmlformats.org/drawingml/2006/main">
               <a:ext uri="{FF2B5EF4-FFF2-40B4-BE49-F238E27FC236}">
-                <a16:creationId xmlns:a16="http://schemas.microsoft.com/office/drawing/2014/main" id="{B21F97A7-A106-4525-A320-FEFC4D19FBDF}"/>
+                <a16:creationId xmlns:a16="http://schemas.microsoft.com/office/drawing/2014/main" id="{612E54FB-BBAF-4DFB-B430-FB99A9228753}"/>
               </a:ext>
             </a:extLst>
           </p:cNvPr>
@@ -13575,7 +13583,7 @@
           <p:cNvPr id="12" name="">
             <a:extLst xmlns:a="http://schemas.openxmlformats.org/drawingml/2006/main">
               <a:ext uri="{FF2B5EF4-FFF2-40B4-BE49-F238E27FC236}">
-                <a16:creationId xmlns:a16="http://schemas.microsoft.com/office/drawing/2014/main" id="{BE8240B0-366F-4C8D-9D73-23E62E4CE30D}"/>
+                <a16:creationId xmlns:a16="http://schemas.microsoft.com/office/drawing/2014/main" id="{C251AE7E-94B1-438D-B178-7D4AA7E8C7A2}"/>
               </a:ext>
             </a:extLst>
           </p:cNvPr>
@@ -13632,7 +13640,7 @@
           <p:cNvPr id="13" name="">
             <a:extLst xmlns:a="http://schemas.openxmlformats.org/drawingml/2006/main">
               <a:ext uri="{FF2B5EF4-FFF2-40B4-BE49-F238E27FC236}">
-                <a16:creationId xmlns:a16="http://schemas.microsoft.com/office/drawing/2014/main" id="{252A848B-33C4-474C-AD57-BBF42E51314C}"/>
+                <a16:creationId xmlns:a16="http://schemas.microsoft.com/office/drawing/2014/main" id="{F233DDA8-B431-4AFD-9344-DF5CA8CA69D7}"/>
               </a:ext>
             </a:extLst>
           </p:cNvPr>
@@ -13689,7 +13697,7 @@
           <p:cNvPr id="14" name="">
             <a:extLst xmlns:a="http://schemas.openxmlformats.org/drawingml/2006/main">
               <a:ext uri="{FF2B5EF4-FFF2-40B4-BE49-F238E27FC236}">
-                <a16:creationId xmlns:a16="http://schemas.microsoft.com/office/drawing/2014/main" id="{2478DCCC-14FC-4C81-8BDD-CD3F450F85E1}"/>
+                <a16:creationId xmlns:a16="http://schemas.microsoft.com/office/drawing/2014/main" id="{9E4AF2A3-6DA0-46B3-BB30-2E888AE8DF36}"/>
               </a:ext>
             </a:extLst>
           </p:cNvPr>
@@ -13723,7 +13731,7 @@
           <p:cNvPr id="15" name="">
             <a:extLst xmlns:a="http://schemas.openxmlformats.org/drawingml/2006/main">
               <a:ext uri="{FF2B5EF4-FFF2-40B4-BE49-F238E27FC236}">
-                <a16:creationId xmlns:a16="http://schemas.microsoft.com/office/drawing/2014/main" id="{3B42CE74-A376-42C2-80D8-12DD82D6F20A}"/>
+                <a16:creationId xmlns:a16="http://schemas.microsoft.com/office/drawing/2014/main" id="{03640D4F-9AE0-4F19-A33E-7D468234C3A8}"/>
               </a:ext>
             </a:extLst>
           </p:cNvPr>
@@ -13755,7 +13763,7 @@
           <p:cNvPr id="16" name="">
             <a:extLst xmlns:a="http://schemas.openxmlformats.org/drawingml/2006/main">
               <a:ext uri="{FF2B5EF4-FFF2-40B4-BE49-F238E27FC236}">
-                <a16:creationId xmlns:a16="http://schemas.microsoft.com/office/drawing/2014/main" id="{AE8BAE26-F9F0-4740-B4B6-364A650E2C3A}"/>
+                <a16:creationId xmlns:a16="http://schemas.microsoft.com/office/drawing/2014/main" id="{123FA6D9-9B6A-4243-AB14-DDDE5061D5D4}"/>
               </a:ext>
             </a:extLst>
           </p:cNvPr>
@@ -13812,7 +13820,7 @@
           <p:cNvPr id="17" name="">
             <a:extLst xmlns:a="http://schemas.openxmlformats.org/drawingml/2006/main">
               <a:ext uri="{FF2B5EF4-FFF2-40B4-BE49-F238E27FC236}">
-                <a16:creationId xmlns:a16="http://schemas.microsoft.com/office/drawing/2014/main" id="{16D6FC26-E622-4A03-9DED-6F2D222C188D}"/>
+                <a16:creationId xmlns:a16="http://schemas.microsoft.com/office/drawing/2014/main" id="{A349536A-9699-4A51-B441-C750A6EB6927}"/>
               </a:ext>
             </a:extLst>
           </p:cNvPr>
@@ -13869,7 +13877,7 @@
           <p:cNvPr id="18" name="">
             <a:extLst xmlns:a="http://schemas.openxmlformats.org/drawingml/2006/main">
               <a:ext uri="{FF2B5EF4-FFF2-40B4-BE49-F238E27FC236}">
-                <a16:creationId xmlns:a16="http://schemas.microsoft.com/office/drawing/2014/main" id="{3600E230-3AC9-4F08-837D-BEC6D6FED662}"/>
+                <a16:creationId xmlns:a16="http://schemas.microsoft.com/office/drawing/2014/main" id="{B70DC1D4-2086-4847-BAA8-1D18F911D2CF}"/>
               </a:ext>
             </a:extLst>
           </p:cNvPr>
@@ -13903,7 +13911,7 @@
           <p:cNvPr id="19" name="">
             <a:extLst xmlns:a="http://schemas.openxmlformats.org/drawingml/2006/main">
               <a:ext uri="{FF2B5EF4-FFF2-40B4-BE49-F238E27FC236}">
-                <a16:creationId xmlns:a16="http://schemas.microsoft.com/office/drawing/2014/main" id="{E293D6EA-4F3D-4DCC-9934-D424D5FA75CC}"/>
+                <a16:creationId xmlns:a16="http://schemas.microsoft.com/office/drawing/2014/main" id="{C648BE8A-B2E7-4A77-BF5F-0791F8D167EC}"/>
               </a:ext>
             </a:extLst>
           </p:cNvPr>
@@ -13935,7 +13943,7 @@
           <p:cNvPr id="20" name="">
             <a:extLst xmlns:a="http://schemas.openxmlformats.org/drawingml/2006/main">
               <a:ext uri="{FF2B5EF4-FFF2-40B4-BE49-F238E27FC236}">
-                <a16:creationId xmlns:a16="http://schemas.microsoft.com/office/drawing/2014/main" id="{0997D18C-D373-4D2C-A0DA-F75C680DC2EA}"/>
+                <a16:creationId xmlns:a16="http://schemas.microsoft.com/office/drawing/2014/main" id="{22C11DD6-045D-49F7-A26E-6D68AF299707}"/>
               </a:ext>
             </a:extLst>
           </p:cNvPr>
@@ -13992,7 +14000,7 @@
           <p:cNvPr id="21" name="">
             <a:extLst xmlns:a="http://schemas.openxmlformats.org/drawingml/2006/main">
               <a:ext uri="{FF2B5EF4-FFF2-40B4-BE49-F238E27FC236}">
-                <a16:creationId xmlns:a16="http://schemas.microsoft.com/office/drawing/2014/main" id="{C9D9C858-A53B-497A-AA39-D18D7FEDDE74}"/>
+                <a16:creationId xmlns:a16="http://schemas.microsoft.com/office/drawing/2014/main" id="{FFE030E2-BBFC-4237-BD69-5F71732D3348}"/>
               </a:ext>
             </a:extLst>
           </p:cNvPr>
@@ -14047,7 +14055,7 @@
     </p:spTree>
     <p:extLst>
       <p:ext uri="{BB962C8B-B14F-4D97-AF65-F5344CB8AC3E}">
-        <p14:creationId xmlns:p14="http://schemas.microsoft.com/office/powerpoint/2010/main" val="1445475467"/>
+        <p14:creationId xmlns:p14="http://schemas.microsoft.com/office/powerpoint/2010/main" val="1741561277"/>
       </p:ext>
     </p:extLst>
   </p:cSld>
